--- a/analysis/slides/朝食提案_3つの問い.pptx
+++ b/analysis/slides/朝食提案_3つの問い.pptx
@@ -13,9 +13,10 @@
     <p:sldId id="261" r:id="rId7"/>
     <p:sldId id="262" r:id="rId8"/>
     <p:sldId id="263" r:id="rId9"/>
+    <p:sldId id="264" r:id="rId10"/>
   </p:sldIdLst>
   <p:notesMasterIdLst>
-    <p:notesMasterId r:id="rId10"/>
+    <p:notesMasterId r:id="rId11"/>
   </p:notesMasterIdLst>
   <p:sldSz cx="12192000" cy="6858000"/>
   <p:notesSz cx="6858000" cy="12192000"/>
@@ -1849,6 +1850,94 @@
 </p:notes>
 </file>
 
+<file path=ppt/notesSlides/notesSlide9.xml><?xml version="1.0" encoding="utf-8"?>
+<p:notes xmlns:a="http://schemas.openxmlformats.org/drawingml/2006/main" xmlns:r="http://schemas.openxmlformats.org/officeDocument/2006/relationships" xmlns:p="http://schemas.openxmlformats.org/presentationml/2006/main">
+  <p:cSld>
+    <p:spTree>
+      <p:nvGrpSpPr>
+        <p:cNvPr id="1" name=""/>
+        <p:cNvGrpSpPr/>
+        <p:nvPr/>
+      </p:nvGrpSpPr>
+      <p:grpSpPr>
+        <a:xfrm>
+          <a:off x="0" y="0"/>
+          <a:ext cx="0" cy="0"/>
+          <a:chOff x="0" y="0"/>
+          <a:chExt cx="0" cy="0"/>
+        </a:xfrm>
+      </p:grpSpPr>
+      <p:sp>
+        <p:nvSpPr>
+          <p:cNvPr id="2" name="Slide Image Placeholder 1"/>
+          <p:cNvSpPr>
+            <a:spLocks noGrp="1" noRot="1" noChangeAspect="1"/>
+          </p:cNvSpPr>
+          <p:nvPr>
+            <p:ph type="sldImg"/>
+          </p:nvPr>
+        </p:nvSpPr>
+        <p:spPr/>
+      </p:sp>
+      <p:sp>
+        <p:nvSpPr>
+          <p:cNvPr id="3" name="Notes Placeholder 2"/>
+          <p:cNvSpPr>
+            <a:spLocks noGrp="1"/>
+          </p:cNvSpPr>
+          <p:nvPr>
+            <p:ph type="body" idx="1"/>
+          </p:nvPr>
+        </p:nvSpPr>
+        <p:spPr/>
+        <p:txBody>
+          <a:bodyPr/>
+          <a:lstStyle/>
+          <a:p>
+            <a:r>
+              <a:rPr lang="en-US" dirty="0"/>
+              <a:t/>
+            </a:r>
+            <a:endParaRPr lang="en-US" dirty="0"/>
+          </a:p>
+        </p:txBody>
+      </p:sp>
+      <p:sp>
+        <p:nvSpPr>
+          <p:cNvPr id="4" name="Slide Number Placeholder 3"/>
+          <p:cNvSpPr>
+            <a:spLocks noGrp="1"/>
+          </p:cNvSpPr>
+          <p:nvPr>
+            <p:ph type="sldNum" sz="quarter" idx="10"/>
+          </p:nvPr>
+        </p:nvSpPr>
+        <p:spPr/>
+        <p:txBody>
+          <a:bodyPr/>
+          <a:lstStyle/>
+          <a:p>
+            <a:fld id="{F7021451-1387-4CA6-816F-3879F97B5CBC}" type="slidenum">
+              <a:rPr lang="en-US"/>
+              <a:t>9</a:t>
+            </a:fld>
+            <a:endParaRPr lang="en-US"/>
+          </a:p>
+        </p:txBody>
+      </p:sp>
+    </p:spTree>
+    <p:extLst>
+      <p:ext uri="{BB962C8B-B14F-4D97-AF65-F5344CB8AC3E}">
+        <p14:creationId xmlns:p14="http://schemas.microsoft.com/office/powerpoint/2010/main" val="1024086991"/>
+      </p:ext>
+    </p:extLst>
+  </p:cSld>
+  <p:clrMapOvr>
+    <a:masterClrMapping/>
+  </p:clrMapOvr>
+</p:notes>
+</file>
+
 <file path=ppt/slideLayouts/slideLayout1.xml><?xml version="1.0" encoding="utf-8"?>
 <p:sldLayout xmlns:a="http://schemas.openxmlformats.org/drawingml/2006/main" xmlns:r="http://schemas.openxmlformats.org/officeDocument/2006/relationships" xmlns:p="http://schemas.openxmlformats.org/presentationml/2006/main" preserve="1">
   <p:cSld name="DEFAULT">
@@ -2759,7 +2848,7 @@
                 <a:ea typeface="Calibri" pitchFamily="34" charset="-122"/>
                 <a:cs typeface="Calibri" pitchFamily="34" charset="-120"/>
               </a:rPr>
-              <a:t>Q1 – RESULTS</a:t>
+              <a:t>先にお読みください</a:t>
             </a:r>
             <a:endParaRPr lang="en-US" sz="1250" dirty="0"/>
           </a:p>
@@ -2798,7 +2887,7 @@
                 <a:ea typeface="Cambria" pitchFamily="34" charset="-122"/>
                 <a:cs typeface="Cambria" pitchFamily="34" charset="-120"/>
               </a:rPr>
-              <a:t>固形 vs スムージー：結果</a:t>
+              <a:t>新知見：血糖ベースラインの持続的シフト</a:t>
             </a:r>
             <a:endParaRPr lang="en-US" sz="2600" dirty="0"/>
           </a:p>
@@ -2806,75 +2895,14 @@
       </p:sp>
       <p:sp>
         <p:nvSpPr>
-          <p:cNvPr id="4" name="Shape 2"/>
-          <p:cNvSpPr/>
-          <p:nvPr/>
-        </p:nvSpPr>
-        <p:spPr>
-          <a:xfrm>
-            <a:off x="548640" y="1298448"/>
-            <a:ext cx="11091672" cy="384048"/>
-          </a:xfrm>
-          <a:prstGeom prst="roundRect">
-            <a:avLst>
-              <a:gd name="adj" fmla="val 19048"/>
-            </a:avLst>
-          </a:prstGeom>
-          <a:solidFill>
-            <a:srgbClr val="F4F7F9"/>
-          </a:solidFill>
-          <a:ln/>
-        </p:spPr>
-      </p:sp>
-      <p:sp>
-        <p:nvSpPr>
-          <p:cNvPr id="5" name="Text 3"/>
+          <p:cNvPr id="4" name="Text 2"/>
           <p:cNvSpPr txBox="1"/>
           <p:nvPr/>
         </p:nvSpPr>
         <p:spPr>
           <a:xfrm>
-            <a:off x="685800" y="1298448"/>
-            <a:ext cx="548640" cy="384048"/>
-          </a:xfrm>
-          <a:prstGeom prst="rect">
-            <a:avLst/>
-          </a:prstGeom>
-          <a:noFill/>
-          <a:ln/>
-        </p:spPr>
-        <p:txBody>
-          <a:bodyPr wrap="square" lIns="0" tIns="0" rIns="0" bIns="0" rtlCol="0" anchor="ctr"/>
-          <a:lstStyle/>
-          <a:p>
-            <a:pPr algn="ctr" indent="0" marL="0">
-              <a:buNone/>
-            </a:pPr>
-            <a:r>
-              <a:rPr lang="en-US" sz="1400" b="1" dirty="0">
-                <a:solidFill>
-                  <a:srgbClr val="1C7293"/>
-                </a:solidFill>
-                <a:latin typeface="Cambria" pitchFamily="34" charset="0"/>
-                <a:ea typeface="Cambria" pitchFamily="34" charset="-122"/>
-                <a:cs typeface="Cambria" pitchFamily="34" charset="-120"/>
-              </a:rPr>
-              <a:t>Q1</a:t>
-            </a:r>
-            <a:endParaRPr lang="en-US" sz="1400" dirty="0"/>
-          </a:p>
-        </p:txBody>
-      </p:sp>
-      <p:sp>
-        <p:nvSpPr>
-          <p:cNvPr id="6" name="Text 4"/>
-          <p:cNvSpPr txBox="1"/>
-          <p:nvPr/>
-        </p:nvSpPr>
-        <p:spPr>
-          <a:xfrm>
-            <a:off x="1280160" y="1298448"/>
-            <a:ext cx="10177272" cy="384048"/>
+            <a:off x="548640" y="1554480"/>
+            <a:ext cx="11091672" cy="1005840"/>
           </a:xfrm>
           <a:prstGeom prst="rect">
             <a:avLst/>
@@ -2891,551 +2919,6 @@
             </a:pPr>
             <a:r>
               <a:rPr lang="en-US" sz="1300" dirty="0">
-                <a:solidFill>
-                  <a:srgbClr val="21295C"/>
-                </a:solidFill>
-                <a:latin typeface="Calibri" pitchFamily="34" charset="0"/>
-                <a:ea typeface="Calibri" pitchFamily="34" charset="-122"/>
-                <a:cs typeface="Calibri" pitchFamily="34" charset="-120"/>
-              </a:rPr>
-              <a:t>固形が良いのか、スムージーが良いのか？</a:t>
-            </a:r>
-            <a:endParaRPr lang="en-US" sz="1300" dirty="0"/>
-          </a:p>
-        </p:txBody>
-      </p:sp>
-      <p:graphicFrame>
-        <p:nvGraphicFramePr>
-          <p:cNvPr id="7" name="Chart 0" descr=""/>
-          <p:cNvGraphicFramePr/>
-          <p:nvPr/>
-        </p:nvGraphicFramePr>
-        <p:xfrm>
-          <a:off x="548640" y="1874520"/>
-          <a:ext cx="6949440" cy="3246120"/>
-        </p:xfrm>
-        <a:graphic xmlns:a="http://schemas.openxmlformats.org/drawingml/2006/main">
-          <a:graphicData uri="http://schemas.openxmlformats.org/drawingml/2006/chart">
-            <c:chart xmlns:c="http://schemas.openxmlformats.org/drawingml/2006/chart" r:id="rId1"/>
-          </a:graphicData>
-        </a:graphic>
-      </p:graphicFrame>
-      <p:sp>
-        <p:nvSpPr>
-          <p:cNvPr id="8" name="Text 5"/>
-          <p:cNvSpPr txBox="1"/>
-          <p:nvPr/>
-        </p:nvSpPr>
-        <p:spPr>
-          <a:xfrm>
-            <a:off x="7818120" y="1920240"/>
-            <a:ext cx="3822192" cy="219456"/>
-          </a:xfrm>
-          <a:prstGeom prst="rect">
-            <a:avLst/>
-          </a:prstGeom>
-          <a:noFill/>
-          <a:ln/>
-        </p:spPr>
-        <p:txBody>
-          <a:bodyPr wrap="square" lIns="0" tIns="0" rIns="0" bIns="0" rtlCol="0" anchor="ctr"/>
-          <a:lstStyle/>
-          <a:p>
-            <a:pPr indent="0" marL="0">
-              <a:buNone/>
-            </a:pPr>
-            <a:r>
-              <a:rPr lang="en-US" sz="1050" b="1" dirty="0">
-                <a:solidFill>
-                  <a:srgbClr val="21295C"/>
-                </a:solidFill>
-                <a:latin typeface="Calibri" pitchFamily="34" charset="0"/>
-                <a:ea typeface="Calibri" pitchFamily="34" charset="-122"/>
-                <a:cs typeface="Calibri" pitchFamily="34" charset="-120"/>
-              </a:rPr>
-              <a:t>Δピーク血糖値</a:t>
-            </a:r>
-            <a:endParaRPr lang="en-US" sz="1050" dirty="0"/>
-          </a:p>
-        </p:txBody>
-      </p:sp>
-      <p:sp>
-        <p:nvSpPr>
-          <p:cNvPr id="9" name="Text 6"/>
-          <p:cNvSpPr txBox="1"/>
-          <p:nvPr/>
-        </p:nvSpPr>
-        <p:spPr>
-          <a:xfrm>
-            <a:off x="7818120" y="2139696"/>
-            <a:ext cx="1911096" cy="365760"/>
-          </a:xfrm>
-          <a:prstGeom prst="rect">
-            <a:avLst/>
-          </a:prstGeom>
-          <a:noFill/>
-          <a:ln/>
-        </p:spPr>
-        <p:txBody>
-          <a:bodyPr wrap="square" lIns="0" tIns="0" rIns="0" bIns="0" rtlCol="0" anchor="ctr"/>
-          <a:lstStyle/>
-          <a:p>
-            <a:pPr indent="0" marL="0">
-              <a:buNone/>
-            </a:pPr>
-            <a:r>
-              <a:rPr lang="en-US" sz="1800" b="1" dirty="0">
-                <a:solidFill>
-                  <a:srgbClr val="EB6834"/>
-                </a:solidFill>
-                <a:latin typeface="Cambria" pitchFamily="34" charset="0"/>
-                <a:ea typeface="Cambria" pitchFamily="34" charset="-122"/>
-                <a:cs typeface="Cambria" pitchFamily="34" charset="-120"/>
-              </a:rPr>
-              <a:t>85.0</a:t>
-            </a:r>
-            <a:endParaRPr lang="en-US" sz="1800" dirty="0"/>
-          </a:p>
-        </p:txBody>
-      </p:sp>
-      <p:sp>
-        <p:nvSpPr>
-          <p:cNvPr id="10" name="Text 7"/>
-          <p:cNvSpPr txBox="1"/>
-          <p:nvPr/>
-        </p:nvSpPr>
-        <p:spPr>
-          <a:xfrm>
-            <a:off x="9729216" y="2139696"/>
-            <a:ext cx="1911096" cy="365760"/>
-          </a:xfrm>
-          <a:prstGeom prst="rect">
-            <a:avLst/>
-          </a:prstGeom>
-          <a:noFill/>
-          <a:ln/>
-        </p:spPr>
-        <p:txBody>
-          <a:bodyPr wrap="square" lIns="0" tIns="0" rIns="0" bIns="0" rtlCol="0" anchor="ctr"/>
-          <a:lstStyle/>
-          <a:p>
-            <a:pPr algn="r" indent="0" marL="0">
-              <a:buNone/>
-            </a:pPr>
-            <a:r>
-              <a:rPr lang="en-US" sz="1800" b="1" dirty="0">
-                <a:solidFill>
-                  <a:srgbClr val="2A78D6"/>
-                </a:solidFill>
-                <a:latin typeface="Cambria" pitchFamily="34" charset="0"/>
-                <a:ea typeface="Cambria" pitchFamily="34" charset="-122"/>
-                <a:cs typeface="Cambria" pitchFamily="34" charset="-120"/>
-              </a:rPr>
-              <a:t>53.7</a:t>
-            </a:r>
-            <a:endParaRPr lang="en-US" sz="1800" dirty="0"/>
-          </a:p>
-        </p:txBody>
-      </p:sp>
-      <p:sp>
-        <p:nvSpPr>
-          <p:cNvPr id="11" name="Text 8"/>
-          <p:cNvSpPr txBox="1"/>
-          <p:nvPr/>
-        </p:nvSpPr>
-        <p:spPr>
-          <a:xfrm>
-            <a:off x="7818120" y="2487168"/>
-            <a:ext cx="3822192" cy="182880"/>
-          </a:xfrm>
-          <a:prstGeom prst="rect">
-            <a:avLst/>
-          </a:prstGeom>
-          <a:noFill/>
-          <a:ln/>
-        </p:spPr>
-        <p:txBody>
-          <a:bodyPr wrap="square" lIns="0" tIns="0" rIns="0" bIns="0" rtlCol="0" anchor="ctr"/>
-          <a:lstStyle/>
-          <a:p>
-            <a:pPr indent="0" marL="0">
-              <a:buNone/>
-            </a:pPr>
-            <a:r>
-              <a:rPr lang="en-US" sz="800" dirty="0">
-                <a:solidFill>
-                  <a:srgbClr val="5C6570"/>
-                </a:solidFill>
-                <a:latin typeface="Calibri" pitchFamily="34" charset="0"/>
-                <a:ea typeface="Calibri" pitchFamily="34" charset="-122"/>
-                <a:cs typeface="Calibri" pitchFamily="34" charset="-120"/>
-              </a:rPr>
-              <a:t>mg/dL</a:t>
-            </a:r>
-            <a:endParaRPr lang="en-US" sz="800" dirty="0"/>
-          </a:p>
-        </p:txBody>
-      </p:sp>
-      <p:sp>
-        <p:nvSpPr>
-          <p:cNvPr id="12" name="Text 9"/>
-          <p:cNvSpPr txBox="1"/>
-          <p:nvPr/>
-        </p:nvSpPr>
-        <p:spPr>
-          <a:xfrm>
-            <a:off x="7818120" y="2852928"/>
-            <a:ext cx="3822192" cy="219456"/>
-          </a:xfrm>
-          <a:prstGeom prst="rect">
-            <a:avLst/>
-          </a:prstGeom>
-          <a:noFill/>
-          <a:ln/>
-        </p:spPr>
-        <p:txBody>
-          <a:bodyPr wrap="square" lIns="0" tIns="0" rIns="0" bIns="0" rtlCol="0" anchor="ctr"/>
-          <a:lstStyle/>
-          <a:p>
-            <a:pPr indent="0" marL="0">
-              <a:buNone/>
-            </a:pPr>
-            <a:r>
-              <a:rPr lang="en-US" sz="1050" b="1" dirty="0">
-                <a:solidFill>
-                  <a:srgbClr val="21295C"/>
-                </a:solidFill>
-                <a:latin typeface="Calibri" pitchFamily="34" charset="0"/>
-                <a:ea typeface="Calibri" pitchFamily="34" charset="-122"/>
-                <a:cs typeface="Calibri" pitchFamily="34" charset="-120"/>
-              </a:rPr>
-              <a:t>変動係数 CV</a:t>
-            </a:r>
-            <a:endParaRPr lang="en-US" sz="1050" dirty="0"/>
-          </a:p>
-        </p:txBody>
-      </p:sp>
-      <p:sp>
-        <p:nvSpPr>
-          <p:cNvPr id="13" name="Text 10"/>
-          <p:cNvSpPr txBox="1"/>
-          <p:nvPr/>
-        </p:nvSpPr>
-        <p:spPr>
-          <a:xfrm>
-            <a:off x="7818120" y="3072384"/>
-            <a:ext cx="1911096" cy="365760"/>
-          </a:xfrm>
-          <a:prstGeom prst="rect">
-            <a:avLst/>
-          </a:prstGeom>
-          <a:noFill/>
-          <a:ln/>
-        </p:spPr>
-        <p:txBody>
-          <a:bodyPr wrap="square" lIns="0" tIns="0" rIns="0" bIns="0" rtlCol="0" anchor="ctr"/>
-          <a:lstStyle/>
-          <a:p>
-            <a:pPr indent="0" marL="0">
-              <a:buNone/>
-            </a:pPr>
-            <a:r>
-              <a:rPr lang="en-US" sz="1800" b="1" dirty="0">
-                <a:solidFill>
-                  <a:srgbClr val="EB6834"/>
-                </a:solidFill>
-                <a:latin typeface="Cambria" pitchFamily="34" charset="0"/>
-                <a:ea typeface="Cambria" pitchFamily="34" charset="-122"/>
-                <a:cs typeface="Cambria" pitchFamily="34" charset="-120"/>
-              </a:rPr>
-              <a:t>14.7%</a:t>
-            </a:r>
-            <a:endParaRPr lang="en-US" sz="1800" dirty="0"/>
-          </a:p>
-        </p:txBody>
-      </p:sp>
-      <p:sp>
-        <p:nvSpPr>
-          <p:cNvPr id="14" name="Text 11"/>
-          <p:cNvSpPr txBox="1"/>
-          <p:nvPr/>
-        </p:nvSpPr>
-        <p:spPr>
-          <a:xfrm>
-            <a:off x="9729216" y="3072384"/>
-            <a:ext cx="1911096" cy="365760"/>
-          </a:xfrm>
-          <a:prstGeom prst="rect">
-            <a:avLst/>
-          </a:prstGeom>
-          <a:noFill/>
-          <a:ln/>
-        </p:spPr>
-        <p:txBody>
-          <a:bodyPr wrap="square" lIns="0" tIns="0" rIns="0" bIns="0" rtlCol="0" anchor="ctr"/>
-          <a:lstStyle/>
-          <a:p>
-            <a:pPr algn="r" indent="0" marL="0">
-              <a:buNone/>
-            </a:pPr>
-            <a:r>
-              <a:rPr lang="en-US" sz="1800" b="1" dirty="0">
-                <a:solidFill>
-                  <a:srgbClr val="2A78D6"/>
-                </a:solidFill>
-                <a:latin typeface="Cambria" pitchFamily="34" charset="0"/>
-                <a:ea typeface="Cambria" pitchFamily="34" charset="-122"/>
-                <a:cs typeface="Cambria" pitchFamily="34" charset="-120"/>
-              </a:rPr>
-              <a:t>11.2%</a:t>
-            </a:r>
-            <a:endParaRPr lang="en-US" sz="1800" dirty="0"/>
-          </a:p>
-        </p:txBody>
-      </p:sp>
-      <p:sp>
-        <p:nvSpPr>
-          <p:cNvPr id="15" name="Text 12"/>
-          <p:cNvSpPr txBox="1"/>
-          <p:nvPr/>
-        </p:nvSpPr>
-        <p:spPr>
-          <a:xfrm>
-            <a:off x="7818120" y="3785616"/>
-            <a:ext cx="3822192" cy="219456"/>
-          </a:xfrm>
-          <a:prstGeom prst="rect">
-            <a:avLst/>
-          </a:prstGeom>
-          <a:noFill/>
-          <a:ln/>
-        </p:spPr>
-        <p:txBody>
-          <a:bodyPr wrap="square" lIns="0" tIns="0" rIns="0" bIns="0" rtlCol="0" anchor="ctr"/>
-          <a:lstStyle/>
-          <a:p>
-            <a:pPr indent="0" marL="0">
-              <a:buNone/>
-            </a:pPr>
-            <a:r>
-              <a:rPr lang="en-US" sz="1050" b="1" dirty="0">
-                <a:solidFill>
-                  <a:srgbClr val="21295C"/>
-                </a:solidFill>
-                <a:latin typeface="Calibri" pitchFamily="34" charset="0"/>
-                <a:ea typeface="Calibri" pitchFamily="34" charset="-122"/>
-                <a:cs typeface="Calibri" pitchFamily="34" charset="-120"/>
-              </a:rPr>
-              <a:t>練習中(11-14h)平均血糖</a:t>
-            </a:r>
-            <a:endParaRPr lang="en-US" sz="1050" dirty="0"/>
-          </a:p>
-        </p:txBody>
-      </p:sp>
-      <p:sp>
-        <p:nvSpPr>
-          <p:cNvPr id="16" name="Text 13"/>
-          <p:cNvSpPr txBox="1"/>
-          <p:nvPr/>
-        </p:nvSpPr>
-        <p:spPr>
-          <a:xfrm>
-            <a:off x="7818120" y="4005072"/>
-            <a:ext cx="1911096" cy="365760"/>
-          </a:xfrm>
-          <a:prstGeom prst="rect">
-            <a:avLst/>
-          </a:prstGeom>
-          <a:noFill/>
-          <a:ln/>
-        </p:spPr>
-        <p:txBody>
-          <a:bodyPr wrap="square" lIns="0" tIns="0" rIns="0" bIns="0" rtlCol="0" anchor="ctr"/>
-          <a:lstStyle/>
-          <a:p>
-            <a:pPr indent="0" marL="0">
-              <a:buNone/>
-            </a:pPr>
-            <a:r>
-              <a:rPr lang="en-US" sz="1800" b="1" dirty="0">
-                <a:solidFill>
-                  <a:srgbClr val="EB6834"/>
-                </a:solidFill>
-                <a:latin typeface="Cambria" pitchFamily="34" charset="0"/>
-                <a:ea typeface="Cambria" pitchFamily="34" charset="-122"/>
-                <a:cs typeface="Cambria" pitchFamily="34" charset="-120"/>
-              </a:rPr>
-              <a:t>222.1</a:t>
-            </a:r>
-            <a:endParaRPr lang="en-US" sz="1800" dirty="0"/>
-          </a:p>
-        </p:txBody>
-      </p:sp>
-      <p:sp>
-        <p:nvSpPr>
-          <p:cNvPr id="17" name="Text 14"/>
-          <p:cNvSpPr txBox="1"/>
-          <p:nvPr/>
-        </p:nvSpPr>
-        <p:spPr>
-          <a:xfrm>
-            <a:off x="9729216" y="4005072"/>
-            <a:ext cx="1911096" cy="365760"/>
-          </a:xfrm>
-          <a:prstGeom prst="rect">
-            <a:avLst/>
-          </a:prstGeom>
-          <a:noFill/>
-          <a:ln/>
-        </p:spPr>
-        <p:txBody>
-          <a:bodyPr wrap="square" lIns="0" tIns="0" rIns="0" bIns="0" rtlCol="0" anchor="ctr"/>
-          <a:lstStyle/>
-          <a:p>
-            <a:pPr algn="r" indent="0" marL="0">
-              <a:buNone/>
-            </a:pPr>
-            <a:r>
-              <a:rPr lang="en-US" sz="1800" b="1" dirty="0">
-                <a:solidFill>
-                  <a:srgbClr val="2A78D6"/>
-                </a:solidFill>
-                <a:latin typeface="Cambria" pitchFamily="34" charset="0"/>
-                <a:ea typeface="Cambria" pitchFamily="34" charset="-122"/>
-                <a:cs typeface="Cambria" pitchFamily="34" charset="-120"/>
-              </a:rPr>
-              <a:t>135.1</a:t>
-            </a:r>
-            <a:endParaRPr lang="en-US" sz="1800" dirty="0"/>
-          </a:p>
-        </p:txBody>
-      </p:sp>
-      <p:sp>
-        <p:nvSpPr>
-          <p:cNvPr id="18" name="Text 15"/>
-          <p:cNvSpPr txBox="1"/>
-          <p:nvPr/>
-        </p:nvSpPr>
-        <p:spPr>
-          <a:xfrm>
-            <a:off x="7818120" y="4352544"/>
-            <a:ext cx="3822192" cy="182880"/>
-          </a:xfrm>
-          <a:prstGeom prst="rect">
-            <a:avLst/>
-          </a:prstGeom>
-          <a:noFill/>
-          <a:ln/>
-        </p:spPr>
-        <p:txBody>
-          <a:bodyPr wrap="square" lIns="0" tIns="0" rIns="0" bIns="0" rtlCol="0" anchor="ctr"/>
-          <a:lstStyle/>
-          <a:p>
-            <a:pPr indent="0" marL="0">
-              <a:buNone/>
-            </a:pPr>
-            <a:r>
-              <a:rPr lang="en-US" sz="800" dirty="0">
-                <a:solidFill>
-                  <a:srgbClr val="5C6570"/>
-                </a:solidFill>
-                <a:latin typeface="Calibri" pitchFamily="34" charset="0"/>
-                <a:ea typeface="Calibri" pitchFamily="34" charset="-122"/>
-                <a:cs typeface="Calibri" pitchFamily="34" charset="-120"/>
-              </a:rPr>
-              <a:t>mg/dL＝燃料供給</a:t>
-            </a:r>
-            <a:endParaRPr lang="en-US" sz="800" dirty="0"/>
-          </a:p>
-        </p:txBody>
-      </p:sp>
-      <p:sp>
-        <p:nvSpPr>
-          <p:cNvPr id="19" name="Text 16"/>
-          <p:cNvSpPr txBox="1"/>
-          <p:nvPr/>
-        </p:nvSpPr>
-        <p:spPr>
-          <a:xfrm>
-            <a:off x="7818120" y="4736592"/>
-            <a:ext cx="3822192" cy="274320"/>
-          </a:xfrm>
-          <a:prstGeom prst="rect">
-            <a:avLst/>
-          </a:prstGeom>
-          <a:noFill/>
-          <a:ln/>
-        </p:spPr>
-        <p:txBody>
-          <a:bodyPr wrap="square" lIns="0" tIns="0" rIns="0" bIns="0" rtlCol="0" anchor="ctr"/>
-          <a:lstStyle/>
-          <a:p>
-            <a:pPr indent="0" marL="0">
-              <a:buNone/>
-            </a:pPr>
-            <a:r>
-              <a:rPr lang="en-US" sz="900" dirty="0">
-                <a:solidFill>
-                  <a:srgbClr val="5C6570"/>
-                </a:solidFill>
-                <a:latin typeface="Calibri" pitchFamily="34" charset="0"/>
-                <a:ea typeface="Calibri" pitchFamily="34" charset="-122"/>
-                <a:cs typeface="Calibri" pitchFamily="34" charset="-120"/>
-              </a:rPr>
-              <a:t>上＝スムージー／下＝固形</a:t>
-            </a:r>
-            <a:endParaRPr lang="en-US" sz="900" dirty="0"/>
-          </a:p>
-        </p:txBody>
-      </p:sp>
-      <p:sp>
-        <p:nvSpPr>
-          <p:cNvPr id="20" name="Shape 17"/>
-          <p:cNvSpPr/>
-          <p:nvPr/>
-        </p:nvSpPr>
-        <p:spPr>
-          <a:xfrm>
-            <a:off x="548640" y="5303520"/>
-            <a:ext cx="11091672" cy="960120"/>
-          </a:xfrm>
-          <a:prstGeom prst="roundRect">
-            <a:avLst>
-              <a:gd name="adj" fmla="val 9524"/>
-            </a:avLst>
-          </a:prstGeom>
-          <a:solidFill>
-            <a:srgbClr val="F4F7F9"/>
-          </a:solidFill>
-          <a:ln/>
-        </p:spPr>
-      </p:sp>
-      <p:sp>
-        <p:nvSpPr>
-          <p:cNvPr id="21" name="Text 18"/>
-          <p:cNvSpPr txBox="1"/>
-          <p:nvPr/>
-        </p:nvSpPr>
-        <p:spPr>
-          <a:xfrm>
-            <a:off x="777240" y="5394960"/>
-            <a:ext cx="10634472" cy="777240"/>
-          </a:xfrm>
-          <a:prstGeom prst="rect">
-            <a:avLst/>
-          </a:prstGeom>
-          <a:noFill/>
-          <a:ln/>
-        </p:spPr>
-        <p:txBody>
-          <a:bodyPr wrap="square" lIns="0" tIns="0" rIns="0" bIns="0" rtlCol="0" anchor="ctr"/>
-          <a:lstStyle/>
-          <a:p>
-            <a:pPr indent="0" marL="0">
-              <a:buNone/>
-            </a:pPr>
-            <a:r>
-              <a:rPr lang="en-US" sz="1100" dirty="0">
                 <a:solidFill>
                   <a:srgbClr val="1A1A1A"/>
                 </a:solidFill>
@@ -3443,22 +2926,620 @@
                 <a:ea typeface="Calibri" pitchFamily="34" charset="-122"/>
                 <a:cs typeface="Calibri" pitchFamily="34" charset="-120"/>
               </a:rPr>
-              <a:t>自覚コンディション・毎日のコンディション：頭痛・吐き気はどちらも全時点で最小値、満腹感・食欲もほぼ同水準。夜間コンディション（起床時・睡眠）にも大きな差はない（ただし練習時間がスムージー60分/日・固形140分/日と大きく異なり、RPE等は練習量の交絡を強く受ける）。</a:t>
-            </a:r>
-            <a:endParaRPr lang="en-US" sz="1100" dirty="0"/>
-          </a:p>
-        </p:txBody>
-      </p:sp>
-      <p:sp>
-        <p:nvSpPr>
-          <p:cNvPr id="22" name="Text 19"/>
+              <a:t>14日間の連続CGMデータで、DAY5（8/29）14:50頃から血糖が持続的に上昇し、以後一度も元の水準に戻っていないことが判明しました。夜間平均血糖：DAY1〜4は93〜107 mg/dL→DAY6以降は130〜177 mg/dL。低血糖（70mg/dL未満）は14日間通じて一度も検出されていません。</a:t>
+            </a:r>
+            <a:endParaRPr lang="en-US" sz="1300" dirty="0"/>
+          </a:p>
+        </p:txBody>
+      </p:sp>
+      <p:graphicFrame>
+        <p:nvGraphicFramePr>
+          <p:cNvPr id="3" name="Table 0"/>
+          <p:cNvGraphicFramePr>
+            <a:graphicFrameLocks noGrp="1"/>
+          </p:cNvGraphicFramePr>
+          <p:nvPr>
+            <p:extLst>
+              <p:ext uri="{D42A27DB-BD31-4B8C-83A1-F6EECF244321}">
+                <p14:modId xmlns:p14="http://schemas.microsoft.com/office/powerpoint/2010/main" val="1579011935"/>
+              </p:ext>
+            </p:extLst>
+          </p:nvPr>
+        </p:nvGraphicFramePr>
+        <p:xfrm>
+          <a:off x="548640" y="2743200"/>
+          <a:ext cx="11091672" cy="1828800"/>
+        </p:xfrm>
+        <a:graphic>
+          <a:graphicData uri="http://schemas.openxmlformats.org/drawingml/2006/table">
+            <a:tbl>
+              <a:tblPr/>
+              <a:tblGrid>
+                <a:gridCol w="3776472"/>
+                <a:gridCol w="7863840"/>
+              </a:tblGrid>
+              <a:tr h="457200">
+                <a:tc>
+                  <a:txBody>
+                    <a:bodyPr/>
+                    <a:lstStyle/>
+                    <a:p>
+                      <a:pPr indent="0" marL="0">
+                        <a:buNone/>
+                      </a:pPr>
+                      <a:r>
+                        <a:rPr lang="en-US" sz="1300" b="1" dirty="0">
+                          <a:solidFill>
+                            <a:srgbClr val="FFFFFF"/>
+                          </a:solidFill>
+                          <a:latin typeface="Calibri" pitchFamily="34" charset="0"/>
+                          <a:ea typeface="Calibri" pitchFamily="34" charset="-122"/>
+                          <a:cs typeface="Calibri" pitchFamily="34" charset="-120"/>
+                        </a:rPr>
+                        <a:t>この提案への影響</a:t>
+                      </a:r>
+                      <a:endParaRPr lang="en-US" sz="1300" dirty="0">
+                        <a:latin typeface="Calibri" charset="0"/>
+                        <a:ea typeface="Calibri" charset="0"/>
+                        <a:cs typeface="Calibri" charset="0"/>
+                      </a:endParaRPr>
+                    </a:p>
+                  </a:txBody>
+                  <a:tcPr marL="91440" marR="91440" marT="45720" marB="45720" anchor="ctr">
+                    <a:lnL w="9525" cap="flat" cmpd="sng" algn="ctr">
+                      <a:solidFill>
+                        <a:srgbClr val="E3E1DB"/>
+                      </a:solidFill>
+                      <a:prstDash val="solid"/>
+                      <a:round/>
+                      <a:headEnd type="none" w="med" len="med"/>
+                      <a:tailEnd type="none" w="med" len="med"/>
+                    </a:lnL>
+                    <a:lnR w="9525" cap="flat" cmpd="sng" algn="ctr">
+                      <a:solidFill>
+                        <a:srgbClr val="E3E1DB"/>
+                      </a:solidFill>
+                      <a:prstDash val="solid"/>
+                      <a:round/>
+                      <a:headEnd type="none" w="med" len="med"/>
+                      <a:tailEnd type="none" w="med" len="med"/>
+                    </a:lnR>
+                    <a:lnT w="9525" cap="flat" cmpd="sng" algn="ctr">
+                      <a:solidFill>
+                        <a:srgbClr val="E3E1DB"/>
+                      </a:solidFill>
+                      <a:prstDash val="solid"/>
+                      <a:round/>
+                      <a:headEnd type="none" w="med" len="med"/>
+                      <a:tailEnd type="none" w="med" len="med"/>
+                    </a:lnT>
+                    <a:lnB w="9525" cap="flat" cmpd="sng" algn="ctr">
+                      <a:solidFill>
+                        <a:srgbClr val="E3E1DB"/>
+                      </a:solidFill>
+                      <a:prstDash val="solid"/>
+                      <a:round/>
+                      <a:headEnd type="none" w="med" len="med"/>
+                      <a:tailEnd type="none" w="med" len="med"/>
+                    </a:lnB>
+                    <a:solidFill>
+                      <a:srgbClr val="21295C"/>
+                    </a:solidFill>
+                  </a:tcPr>
+                </a:tc>
+                <a:tc>
+                  <a:txBody>
+                    <a:bodyPr/>
+                    <a:lstStyle/>
+                    <a:p>
+                      <a:pPr indent="0" marL="0">
+                        <a:buNone/>
+                      </a:pPr>
+                      <a:endParaRPr lang="en-US" sz="1300" dirty="0">
+                        <a:latin typeface="Calibri" charset="0"/>
+                        <a:ea typeface="Calibri" charset="0"/>
+                        <a:cs typeface="Calibri" charset="0"/>
+                      </a:endParaRPr>
+                    </a:p>
+                  </a:txBody>
+                  <a:tcPr marL="91440" marR="91440" marT="45720" marB="45720" anchor="ctr">
+                    <a:lnL w="9525" cap="flat" cmpd="sng" algn="ctr">
+                      <a:solidFill>
+                        <a:srgbClr val="E3E1DB"/>
+                      </a:solidFill>
+                      <a:prstDash val="solid"/>
+                      <a:round/>
+                      <a:headEnd type="none" w="med" len="med"/>
+                      <a:tailEnd type="none" w="med" len="med"/>
+                    </a:lnL>
+                    <a:lnR w="9525" cap="flat" cmpd="sng" algn="ctr">
+                      <a:solidFill>
+                        <a:srgbClr val="E3E1DB"/>
+                      </a:solidFill>
+                      <a:prstDash val="solid"/>
+                      <a:round/>
+                      <a:headEnd type="none" w="med" len="med"/>
+                      <a:tailEnd type="none" w="med" len="med"/>
+                    </a:lnR>
+                    <a:lnT w="9525" cap="flat" cmpd="sng" algn="ctr">
+                      <a:solidFill>
+                        <a:srgbClr val="E3E1DB"/>
+                      </a:solidFill>
+                      <a:prstDash val="solid"/>
+                      <a:round/>
+                      <a:headEnd type="none" w="med" len="med"/>
+                      <a:tailEnd type="none" w="med" len="med"/>
+                    </a:lnT>
+                    <a:lnB w="9525" cap="flat" cmpd="sng" algn="ctr">
+                      <a:solidFill>
+                        <a:srgbClr val="E3E1DB"/>
+                      </a:solidFill>
+                      <a:prstDash val="solid"/>
+                      <a:round/>
+                      <a:headEnd type="none" w="med" len="med"/>
+                      <a:tailEnd type="none" w="med" len="med"/>
+                    </a:lnB>
+                    <a:solidFill>
+                      <a:srgbClr val="21295C"/>
+                    </a:solidFill>
+                  </a:tcPr>
+                </a:tc>
+              </a:tr>
+              <a:tr h="457200">
+                <a:tc>
+                  <a:txBody>
+                    <a:bodyPr/>
+                    <a:lstStyle/>
+                    <a:p>
+                      <a:pPr indent="0" marL="0">
+                        <a:buNone/>
+                      </a:pPr>
+                      <a:r>
+                        <a:rPr lang="en-US" sz="1300" b="1" dirty="0">
+                          <a:solidFill>
+                            <a:srgbClr val="21295C"/>
+                          </a:solidFill>
+                          <a:latin typeface="Calibri" pitchFamily="34" charset="0"/>
+                          <a:ea typeface="Calibri" pitchFamily="34" charset="-122"/>
+                          <a:cs typeface="Calibri" pitchFamily="34" charset="-120"/>
+                        </a:rPr>
+                        <a:t>Q1（固形 vs スムージー）</a:t>
+                      </a:r>
+                      <a:endParaRPr lang="en-US" sz="1300" dirty="0">
+                        <a:latin typeface="Calibri" charset="0"/>
+                        <a:ea typeface="Calibri" charset="0"/>
+                        <a:cs typeface="Calibri" charset="0"/>
+                      </a:endParaRPr>
+                    </a:p>
+                  </a:txBody>
+                  <a:tcPr marL="91440" marR="91440" marT="45720" marB="45720" anchor="ctr">
+                    <a:lnL w="9525" cap="flat" cmpd="sng" algn="ctr">
+                      <a:solidFill>
+                        <a:srgbClr val="E3E1DB"/>
+                      </a:solidFill>
+                      <a:prstDash val="solid"/>
+                      <a:round/>
+                      <a:headEnd type="none" w="med" len="med"/>
+                      <a:tailEnd type="none" w="med" len="med"/>
+                    </a:lnL>
+                    <a:lnR w="9525" cap="flat" cmpd="sng" algn="ctr">
+                      <a:solidFill>
+                        <a:srgbClr val="E3E1DB"/>
+                      </a:solidFill>
+                      <a:prstDash val="solid"/>
+                      <a:round/>
+                      <a:headEnd type="none" w="med" len="med"/>
+                      <a:tailEnd type="none" w="med" len="med"/>
+                    </a:lnR>
+                    <a:lnT w="9525" cap="flat" cmpd="sng" algn="ctr">
+                      <a:solidFill>
+                        <a:srgbClr val="E3E1DB"/>
+                      </a:solidFill>
+                      <a:prstDash val="solid"/>
+                      <a:round/>
+                      <a:headEnd type="none" w="med" len="med"/>
+                      <a:tailEnd type="none" w="med" len="med"/>
+                    </a:lnT>
+                    <a:lnB w="9525" cap="flat" cmpd="sng" algn="ctr">
+                      <a:solidFill>
+                        <a:srgbClr val="E3E1DB"/>
+                      </a:solidFill>
+                      <a:prstDash val="solid"/>
+                      <a:round/>
+                      <a:headEnd type="none" w="med" len="med"/>
+                      <a:tailEnd type="none" w="med" len="med"/>
+                    </a:lnB>
+                    <a:solidFill>
+                      <a:srgbClr val="FFFFFF"/>
+                    </a:solidFill>
+                  </a:tcPr>
+                </a:tc>
+                <a:tc>
+                  <a:txBody>
+                    <a:bodyPr/>
+                    <a:lstStyle/>
+                    <a:p>
+                      <a:pPr indent="0" marL="0">
+                        <a:buNone/>
+                      </a:pPr>
+                      <a:r>
+                        <a:rPr lang="en-US" sz="1300" dirty="0">
+                          <a:solidFill>
+                            <a:srgbClr val="6B4B00"/>
+                          </a:solidFill>
+                          <a:latin typeface="Calibri" pitchFamily="34" charset="0"/>
+                          <a:ea typeface="Calibri" pitchFamily="34" charset="-122"/>
+                          <a:cs typeface="Calibri" pitchFamily="34" charset="-120"/>
+                        </a:rPr>
+                        <a:t>⚠ スムージーはDAY4・5(シフト前)とDAY6(シフト後)が混在。結論は参考値として扱う</a:t>
+                      </a:r>
+                      <a:endParaRPr lang="en-US" sz="1300" dirty="0">
+                        <a:latin typeface="Calibri" charset="0"/>
+                        <a:ea typeface="Calibri" charset="0"/>
+                        <a:cs typeface="Calibri" charset="0"/>
+                      </a:endParaRPr>
+                    </a:p>
+                  </a:txBody>
+                  <a:tcPr marL="91440" marR="91440" marT="45720" marB="45720" anchor="ctr">
+                    <a:lnL w="9525" cap="flat" cmpd="sng" algn="ctr">
+                      <a:solidFill>
+                        <a:srgbClr val="E3E1DB"/>
+                      </a:solidFill>
+                      <a:prstDash val="solid"/>
+                      <a:round/>
+                      <a:headEnd type="none" w="med" len="med"/>
+                      <a:tailEnd type="none" w="med" len="med"/>
+                    </a:lnL>
+                    <a:lnR w="9525" cap="flat" cmpd="sng" algn="ctr">
+                      <a:solidFill>
+                        <a:srgbClr val="E3E1DB"/>
+                      </a:solidFill>
+                      <a:prstDash val="solid"/>
+                      <a:round/>
+                      <a:headEnd type="none" w="med" len="med"/>
+                      <a:tailEnd type="none" w="med" len="med"/>
+                    </a:lnR>
+                    <a:lnT w="9525" cap="flat" cmpd="sng" algn="ctr">
+                      <a:solidFill>
+                        <a:srgbClr val="E3E1DB"/>
+                      </a:solidFill>
+                      <a:prstDash val="solid"/>
+                      <a:round/>
+                      <a:headEnd type="none" w="med" len="med"/>
+                      <a:tailEnd type="none" w="med" len="med"/>
+                    </a:lnT>
+                    <a:lnB w="9525" cap="flat" cmpd="sng" algn="ctr">
+                      <a:solidFill>
+                        <a:srgbClr val="E3E1DB"/>
+                      </a:solidFill>
+                      <a:prstDash val="solid"/>
+                      <a:round/>
+                      <a:headEnd type="none" w="med" len="med"/>
+                      <a:tailEnd type="none" w="med" len="med"/>
+                    </a:lnB>
+                    <a:solidFill>
+                      <a:srgbClr val="FFFFFF"/>
+                    </a:solidFill>
+                  </a:tcPr>
+                </a:tc>
+              </a:tr>
+              <a:tr h="457200">
+                <a:tc>
+                  <a:txBody>
+                    <a:bodyPr/>
+                    <a:lstStyle/>
+                    <a:p>
+                      <a:pPr indent="0" marL="0">
+                        <a:buNone/>
+                      </a:pPr>
+                      <a:r>
+                        <a:rPr lang="en-US" sz="1300" b="1" dirty="0">
+                          <a:solidFill>
+                            <a:srgbClr val="21295C"/>
+                          </a:solidFill>
+                          <a:latin typeface="Calibri" pitchFamily="34" charset="0"/>
+                          <a:ea typeface="Calibri" pitchFamily="34" charset="-122"/>
+                          <a:cs typeface="Calibri" pitchFamily="34" charset="-120"/>
+                        </a:rPr>
+                        <a:t>Q2（食べるタイミング）</a:t>
+                      </a:r>
+                      <a:endParaRPr lang="en-US" sz="1300" dirty="0">
+                        <a:latin typeface="Calibri" charset="0"/>
+                        <a:ea typeface="Calibri" charset="0"/>
+                        <a:cs typeface="Calibri" charset="0"/>
+                      </a:endParaRPr>
+                    </a:p>
+                  </a:txBody>
+                  <a:tcPr marL="91440" marR="91440" marT="45720" marB="45720" anchor="ctr">
+                    <a:lnL w="9525" cap="flat" cmpd="sng" algn="ctr">
+                      <a:solidFill>
+                        <a:srgbClr val="E3E1DB"/>
+                      </a:solidFill>
+                      <a:prstDash val="solid"/>
+                      <a:round/>
+                      <a:headEnd type="none" w="med" len="med"/>
+                      <a:tailEnd type="none" w="med" len="med"/>
+                    </a:lnL>
+                    <a:lnR w="9525" cap="flat" cmpd="sng" algn="ctr">
+                      <a:solidFill>
+                        <a:srgbClr val="E3E1DB"/>
+                      </a:solidFill>
+                      <a:prstDash val="solid"/>
+                      <a:round/>
+                      <a:headEnd type="none" w="med" len="med"/>
+                      <a:tailEnd type="none" w="med" len="med"/>
+                    </a:lnR>
+                    <a:lnT w="9525" cap="flat" cmpd="sng" algn="ctr">
+                      <a:solidFill>
+                        <a:srgbClr val="E3E1DB"/>
+                      </a:solidFill>
+                      <a:prstDash val="solid"/>
+                      <a:round/>
+                      <a:headEnd type="none" w="med" len="med"/>
+                      <a:tailEnd type="none" w="med" len="med"/>
+                    </a:lnT>
+                    <a:lnB w="9525" cap="flat" cmpd="sng" algn="ctr">
+                      <a:solidFill>
+                        <a:srgbClr val="E3E1DB"/>
+                      </a:solidFill>
+                      <a:prstDash val="solid"/>
+                      <a:round/>
+                      <a:headEnd type="none" w="med" len="med"/>
+                      <a:tailEnd type="none" w="med" len="med"/>
+                    </a:lnB>
+                    <a:solidFill>
+                      <a:srgbClr val="F4F7F9"/>
+                    </a:solidFill>
+                  </a:tcPr>
+                </a:tc>
+                <a:tc>
+                  <a:txBody>
+                    <a:bodyPr/>
+                    <a:lstStyle/>
+                    <a:p>
+                      <a:pPr indent="0" marL="0">
+                        <a:buNone/>
+                      </a:pPr>
+                      <a:r>
+                        <a:rPr lang="en-US" sz="1300" dirty="0">
+                          <a:solidFill>
+                            <a:srgbClr val="6B4B00"/>
+                          </a:solidFill>
+                          <a:latin typeface="Calibri" pitchFamily="34" charset="0"/>
+                          <a:ea typeface="Calibri" pitchFamily="34" charset="-122"/>
+                          <a:cs typeface="Calibri" pitchFamily="34" charset="-120"/>
+                        </a:rPr>
+                        <a:t>⚠ 同様にスムージー側がシフト前後混在。結論は参考値として扱う</a:t>
+                      </a:r>
+                      <a:endParaRPr lang="en-US" sz="1300" dirty="0">
+                        <a:latin typeface="Calibri" charset="0"/>
+                        <a:ea typeface="Calibri" charset="0"/>
+                        <a:cs typeface="Calibri" charset="0"/>
+                      </a:endParaRPr>
+                    </a:p>
+                  </a:txBody>
+                  <a:tcPr marL="91440" marR="91440" marT="45720" marB="45720" anchor="ctr">
+                    <a:lnL w="9525" cap="flat" cmpd="sng" algn="ctr">
+                      <a:solidFill>
+                        <a:srgbClr val="E3E1DB"/>
+                      </a:solidFill>
+                      <a:prstDash val="solid"/>
+                      <a:round/>
+                      <a:headEnd type="none" w="med" len="med"/>
+                      <a:tailEnd type="none" w="med" len="med"/>
+                    </a:lnL>
+                    <a:lnR w="9525" cap="flat" cmpd="sng" algn="ctr">
+                      <a:solidFill>
+                        <a:srgbClr val="E3E1DB"/>
+                      </a:solidFill>
+                      <a:prstDash val="solid"/>
+                      <a:round/>
+                      <a:headEnd type="none" w="med" len="med"/>
+                      <a:tailEnd type="none" w="med" len="med"/>
+                    </a:lnR>
+                    <a:lnT w="9525" cap="flat" cmpd="sng" algn="ctr">
+                      <a:solidFill>
+                        <a:srgbClr val="E3E1DB"/>
+                      </a:solidFill>
+                      <a:prstDash val="solid"/>
+                      <a:round/>
+                      <a:headEnd type="none" w="med" len="med"/>
+                      <a:tailEnd type="none" w="med" len="med"/>
+                    </a:lnT>
+                    <a:lnB w="9525" cap="flat" cmpd="sng" algn="ctr">
+                      <a:solidFill>
+                        <a:srgbClr val="E3E1DB"/>
+                      </a:solidFill>
+                      <a:prstDash val="solid"/>
+                      <a:round/>
+                      <a:headEnd type="none" w="med" len="med"/>
+                      <a:tailEnd type="none" w="med" len="med"/>
+                    </a:lnB>
+                    <a:solidFill>
+                      <a:srgbClr val="F4F7F9"/>
+                    </a:solidFill>
+                  </a:tcPr>
+                </a:tc>
+              </a:tr>
+              <a:tr h="457200">
+                <a:tc>
+                  <a:txBody>
+                    <a:bodyPr/>
+                    <a:lstStyle/>
+                    <a:p>
+                      <a:pPr indent="0" marL="0">
+                        <a:buNone/>
+                      </a:pPr>
+                      <a:r>
+                        <a:rPr lang="en-US" sz="1300" b="1" dirty="0">
+                          <a:solidFill>
+                            <a:srgbClr val="21295C"/>
+                          </a:solidFill>
+                          <a:latin typeface="Calibri" pitchFamily="34" charset="0"/>
+                          <a:ea typeface="Calibri" pitchFamily="34" charset="-122"/>
+                          <a:cs typeface="Calibri" pitchFamily="34" charset="-120"/>
+                        </a:rPr>
+                        <a:t>Q3（糖質量）</a:t>
+                      </a:r>
+                      <a:endParaRPr lang="en-US" sz="1300" dirty="0">
+                        <a:latin typeface="Calibri" charset="0"/>
+                        <a:ea typeface="Calibri" charset="0"/>
+                        <a:cs typeface="Calibri" charset="0"/>
+                      </a:endParaRPr>
+                    </a:p>
+                  </a:txBody>
+                  <a:tcPr marL="91440" marR="91440" marT="45720" marB="45720" anchor="ctr">
+                    <a:lnL w="9525" cap="flat" cmpd="sng" algn="ctr">
+                      <a:solidFill>
+                        <a:srgbClr val="E3E1DB"/>
+                      </a:solidFill>
+                      <a:prstDash val="solid"/>
+                      <a:round/>
+                      <a:headEnd type="none" w="med" len="med"/>
+                      <a:tailEnd type="none" w="med" len="med"/>
+                    </a:lnL>
+                    <a:lnR w="9525" cap="flat" cmpd="sng" algn="ctr">
+                      <a:solidFill>
+                        <a:srgbClr val="E3E1DB"/>
+                      </a:solidFill>
+                      <a:prstDash val="solid"/>
+                      <a:round/>
+                      <a:headEnd type="none" w="med" len="med"/>
+                      <a:tailEnd type="none" w="med" len="med"/>
+                    </a:lnR>
+                    <a:lnT w="9525" cap="flat" cmpd="sng" algn="ctr">
+                      <a:solidFill>
+                        <a:srgbClr val="E3E1DB"/>
+                      </a:solidFill>
+                      <a:prstDash val="solid"/>
+                      <a:round/>
+                      <a:headEnd type="none" w="med" len="med"/>
+                      <a:tailEnd type="none" w="med" len="med"/>
+                    </a:lnT>
+                    <a:lnB w="9525" cap="flat" cmpd="sng" algn="ctr">
+                      <a:solidFill>
+                        <a:srgbClr val="E3E1DB"/>
+                      </a:solidFill>
+                      <a:prstDash val="solid"/>
+                      <a:round/>
+                      <a:headEnd type="none" w="med" len="med"/>
+                      <a:tailEnd type="none" w="med" len="med"/>
+                    </a:lnB>
+                    <a:solidFill>
+                      <a:srgbClr val="FFFFFF"/>
+                    </a:solidFill>
+                  </a:tcPr>
+                </a:tc>
+                <a:tc>
+                  <a:txBody>
+                    <a:bodyPr/>
+                    <a:lstStyle/>
+                    <a:p>
+                      <a:pPr indent="0" marL="0">
+                        <a:buNone/>
+                      </a:pPr>
+                      <a:r>
+                        <a:rPr lang="en-US" sz="1300" dirty="0">
+                          <a:solidFill>
+                            <a:srgbClr val="0F5C3D"/>
+                          </a:solidFill>
+                          <a:latin typeface="Calibri" pitchFamily="34" charset="0"/>
+                          <a:ea typeface="Calibri" pitchFamily="34" charset="-122"/>
+                          <a:cs typeface="Calibri" pitchFamily="34" charset="-120"/>
+                        </a:rPr>
+                        <a:t>✓ 両条件ともシフト後で条件が揃っており、結論は維持できる</a:t>
+                      </a:r>
+                      <a:endParaRPr lang="en-US" sz="1300" dirty="0">
+                        <a:latin typeface="Calibri" charset="0"/>
+                        <a:ea typeface="Calibri" charset="0"/>
+                        <a:cs typeface="Calibri" charset="0"/>
+                      </a:endParaRPr>
+                    </a:p>
+                  </a:txBody>
+                  <a:tcPr marL="91440" marR="91440" marT="45720" marB="45720" anchor="ctr">
+                    <a:lnL w="9525" cap="flat" cmpd="sng" algn="ctr">
+                      <a:solidFill>
+                        <a:srgbClr val="E3E1DB"/>
+                      </a:solidFill>
+                      <a:prstDash val="solid"/>
+                      <a:round/>
+                      <a:headEnd type="none" w="med" len="med"/>
+                      <a:tailEnd type="none" w="med" len="med"/>
+                    </a:lnL>
+                    <a:lnR w="9525" cap="flat" cmpd="sng" algn="ctr">
+                      <a:solidFill>
+                        <a:srgbClr val="E3E1DB"/>
+                      </a:solidFill>
+                      <a:prstDash val="solid"/>
+                      <a:round/>
+                      <a:headEnd type="none" w="med" len="med"/>
+                      <a:tailEnd type="none" w="med" len="med"/>
+                    </a:lnR>
+                    <a:lnT w="9525" cap="flat" cmpd="sng" algn="ctr">
+                      <a:solidFill>
+                        <a:srgbClr val="E3E1DB"/>
+                      </a:solidFill>
+                      <a:prstDash val="solid"/>
+                      <a:round/>
+                      <a:headEnd type="none" w="med" len="med"/>
+                      <a:tailEnd type="none" w="med" len="med"/>
+                    </a:lnT>
+                    <a:lnB w="9525" cap="flat" cmpd="sng" algn="ctr">
+                      <a:solidFill>
+                        <a:srgbClr val="E3E1DB"/>
+                      </a:solidFill>
+                      <a:prstDash val="solid"/>
+                      <a:round/>
+                      <a:headEnd type="none" w="med" len="med"/>
+                      <a:tailEnd type="none" w="med" len="med"/>
+                    </a:lnB>
+                    <a:solidFill>
+                      <a:srgbClr val="FFFFFF"/>
+                    </a:solidFill>
+                  </a:tcPr>
+                </a:tc>
+              </a:tr>
+            </a:tbl>
+          </a:graphicData>
+        </a:graphic>
+      </p:graphicFrame>
+      <p:sp>
+        <p:nvSpPr>
+          <p:cNvPr id="6" name="Shape 3"/>
           <p:cNvSpPr/>
           <p:nvPr/>
         </p:nvSpPr>
         <p:spPr>
           <a:xfrm>
-            <a:off x="548640" y="6492240"/>
-            <a:ext cx="11091672" cy="256032"/>
+            <a:off x="548640" y="4937760"/>
+            <a:ext cx="11091672" cy="1188720"/>
+          </a:xfrm>
+          <a:prstGeom prst="roundRect">
+            <a:avLst>
+              <a:gd name="adj" fmla="val 7692"/>
+            </a:avLst>
+          </a:prstGeom>
+          <a:solidFill>
+            <a:srgbClr val="FDF3E2"/>
+          </a:solidFill>
+          <a:ln w="12700">
+            <a:solidFill>
+              <a:srgbClr val="EDA100"/>
+            </a:solidFill>
+            <a:prstDash val="solid"/>
+          </a:ln>
+        </p:spPr>
+      </p:sp>
+      <p:sp>
+        <p:nvSpPr>
+          <p:cNvPr id="7" name="Text 4"/>
+          <p:cNvSpPr txBox="1"/>
+          <p:nvPr/>
+        </p:nvSpPr>
+        <p:spPr>
+          <a:xfrm>
+            <a:off x="822960" y="5074920"/>
+            <a:ext cx="10543032" cy="914400"/>
           </a:xfrm>
           <a:prstGeom prst="rect">
             <a:avLst/>
@@ -3467,24 +3548,24 @@
           <a:ln/>
         </p:spPr>
         <p:txBody>
-          <a:bodyPr wrap="square" rtlCol="0" anchor="ctr"/>
-          <a:lstStyle/>
-          <a:p>
-            <a:pPr algn="l" indent="0" marL="0">
+          <a:bodyPr wrap="square" lIns="0" tIns="0" rIns="0" bIns="0" rtlCol="0" anchor="ctr"/>
+          <a:lstStyle/>
+          <a:p>
+            <a:pPr indent="0" marL="0">
               <a:buNone/>
             </a:pPr>
             <a:r>
-              <a:rPr lang="en-US" sz="950" dirty="0">
+              <a:rPr lang="en-US" sz="1200" b="1" dirty="0">
                 <a:solidFill>
-                  <a:srgbClr val="5C6570"/>
+                  <a:srgbClr val="6B4B00"/>
                 </a:solidFill>
                 <a:latin typeface="Calibri" pitchFamily="34" charset="0"/>
                 <a:ea typeface="Calibri" pitchFamily="34" charset="-122"/>
                 <a:cs typeface="Calibri" pitchFamily="34" charset="-120"/>
               </a:rPr>
-              <a:t>15分間隔・条件ごとの平均血糖値（各条件3日間平均）。</a:t>
-            </a:r>
-            <a:endParaRPr lang="en-US" sz="950" dirty="0"/>
+              <a:t>原因はデータからは特定できません。選手・スタッフに8/29 14:30〜15:30頃の状況（補食・体調・ストレス）を確認することを推奨します。原因が判明すればQ1・Q2の結論を再評価できます。</a:t>
+            </a:r>
+            <a:endParaRPr lang="en-US" sz="1200" dirty="0"/>
           </a:p>
         </p:txBody>
       </p:sp>
@@ -3553,7 +3634,7 @@
                 <a:ea typeface="Calibri" pitchFamily="34" charset="-122"/>
                 <a:cs typeface="Calibri" pitchFamily="34" charset="-120"/>
               </a:rPr>
-              <a:t>Q1 – DISCUSSION</a:t>
+              <a:t>Q1 – RESULTS</a:t>
             </a:r>
             <a:endParaRPr lang="en-US" sz="1250" dirty="0"/>
           </a:p>
@@ -3592,7 +3673,7 @@
                 <a:ea typeface="Cambria" pitchFamily="34" charset="-122"/>
                 <a:cs typeface="Cambria" pitchFamily="34" charset="-120"/>
               </a:rPr>
-              <a:t>固形 vs スムージー：考察と結論</a:t>
+              <a:t>固形 vs スムージー：結果</a:t>
             </a:r>
             <a:endParaRPr lang="en-US" sz="2600" dirty="0"/>
           </a:p>
@@ -3698,43 +3779,32 @@
           </a:p>
         </p:txBody>
       </p:sp>
-      <p:sp>
-        <p:nvSpPr>
-          <p:cNvPr id="7" name="Shape 5"/>
-          <p:cNvSpPr/>
-          <p:nvPr/>
-        </p:nvSpPr>
-        <p:spPr>
-          <a:xfrm>
-            <a:off x="548640" y="1874520"/>
-            <a:ext cx="11091672" cy="1051560"/>
-          </a:xfrm>
-          <a:prstGeom prst="roundRect">
-            <a:avLst>
-              <a:gd name="adj" fmla="val 10435"/>
-            </a:avLst>
-          </a:prstGeom>
-          <a:solidFill>
-            <a:srgbClr val="EAF7F0"/>
-          </a:solidFill>
-          <a:ln w="15875">
-            <a:solidFill>
-              <a:srgbClr val="EB6834"/>
-            </a:solidFill>
-            <a:prstDash val="solid"/>
-          </a:ln>
-        </p:spPr>
-      </p:sp>
-      <p:sp>
-        <p:nvSpPr>
-          <p:cNvPr id="8" name="Text 6"/>
+      <p:graphicFrame>
+        <p:nvGraphicFramePr>
+          <p:cNvPr id="7" name="Chart 0" descr=""/>
+          <p:cNvGraphicFramePr/>
+          <p:nvPr/>
+        </p:nvGraphicFramePr>
+        <p:xfrm>
+          <a:off x="548640" y="1874520"/>
+          <a:ext cx="6949440" cy="3246120"/>
+        </p:xfrm>
+        <a:graphic xmlns:a="http://schemas.openxmlformats.org/drawingml/2006/main">
+          <a:graphicData uri="http://schemas.openxmlformats.org/drawingml/2006/chart">
+            <c:chart xmlns:c="http://schemas.openxmlformats.org/drawingml/2006/chart" r:id="rId1"/>
+          </a:graphicData>
+        </a:graphic>
+      </p:graphicFrame>
+      <p:sp>
+        <p:nvSpPr>
+          <p:cNvPr id="8" name="Text 5"/>
           <p:cNvSpPr txBox="1"/>
           <p:nvPr/>
         </p:nvSpPr>
         <p:spPr>
           <a:xfrm>
-            <a:off x="822960" y="1984248"/>
-            <a:ext cx="1828800" cy="274320"/>
+            <a:off x="7818120" y="1920240"/>
+            <a:ext cx="3822192" cy="219456"/>
           </a:xfrm>
           <a:prstGeom prst="rect">
             <a:avLst/>
@@ -3750,30 +3820,30 @@
               <a:buNone/>
             </a:pPr>
             <a:r>
-              <a:rPr lang="en-US" sz="1200" b="1" dirty="0">
+              <a:rPr lang="en-US" sz="1050" b="1" dirty="0">
                 <a:solidFill>
-                  <a:srgbClr val="0F5C3D"/>
+                  <a:srgbClr val="21295C"/>
                 </a:solidFill>
                 <a:latin typeface="Calibri" pitchFamily="34" charset="0"/>
                 <a:ea typeface="Calibri" pitchFamily="34" charset="-122"/>
                 <a:cs typeface="Calibri" pitchFamily="34" charset="-120"/>
               </a:rPr>
-              <a:t>✓ 答え</a:t>
-            </a:r>
-            <a:endParaRPr lang="en-US" sz="1200" dirty="0"/>
-          </a:p>
-        </p:txBody>
-      </p:sp>
-      <p:sp>
-        <p:nvSpPr>
-          <p:cNvPr id="9" name="Text 7"/>
+              <a:t>Δピーク血糖値</a:t>
+            </a:r>
+            <a:endParaRPr lang="en-US" sz="1050" dirty="0"/>
+          </a:p>
+        </p:txBody>
+      </p:sp>
+      <p:sp>
+        <p:nvSpPr>
+          <p:cNvPr id="9" name="Text 6"/>
           <p:cNvSpPr txBox="1"/>
           <p:nvPr/>
         </p:nvSpPr>
         <p:spPr>
           <a:xfrm>
-            <a:off x="822960" y="2258568"/>
-            <a:ext cx="10543032" cy="548640"/>
+            <a:off x="7818120" y="2139696"/>
+            <a:ext cx="1911096" cy="365760"/>
           </a:xfrm>
           <a:prstGeom prst="rect">
             <a:avLst/>
@@ -3789,50 +3859,69 @@
               <a:buNone/>
             </a:pPr>
             <a:r>
-              <a:rPr lang="en-US" sz="2000" b="1" dirty="0">
+              <a:rPr lang="en-US" sz="1800" b="1" dirty="0">
                 <a:solidFill>
-                  <a:srgbClr val="0F5C3D"/>
+                  <a:srgbClr val="EB6834"/>
                 </a:solidFill>
                 <a:latin typeface="Cambria" pitchFamily="34" charset="0"/>
                 <a:ea typeface="Cambria" pitchFamily="34" charset="-122"/>
                 <a:cs typeface="Cambria" pitchFamily="34" charset="-120"/>
               </a:rPr>
-              <a:t>スムージーの方が良い</a:t>
-            </a:r>
-            <a:endParaRPr lang="en-US" sz="2000" dirty="0"/>
-          </a:p>
-        </p:txBody>
-      </p:sp>
-      <p:sp>
-        <p:nvSpPr>
-          <p:cNvPr id="10" name="Shape 8"/>
-          <p:cNvSpPr/>
-          <p:nvPr/>
-        </p:nvSpPr>
-        <p:spPr>
-          <a:xfrm>
-            <a:off x="548640" y="3163824"/>
-            <a:ext cx="109728" cy="109728"/>
-          </a:xfrm>
-          <a:prstGeom prst="oval">
-            <a:avLst/>
-          </a:prstGeom>
-          <a:solidFill>
-            <a:srgbClr val="EB6834"/>
-          </a:solidFill>
-          <a:ln/>
-        </p:spPr>
-      </p:sp>
-      <p:sp>
-        <p:nvSpPr>
-          <p:cNvPr id="11" name="Text 9"/>
+              <a:t>85.0</a:t>
+            </a:r>
+            <a:endParaRPr lang="en-US" sz="1800" dirty="0"/>
+          </a:p>
+        </p:txBody>
+      </p:sp>
+      <p:sp>
+        <p:nvSpPr>
+          <p:cNvPr id="10" name="Text 7"/>
           <p:cNvSpPr txBox="1"/>
           <p:nvPr/>
         </p:nvSpPr>
         <p:spPr>
           <a:xfrm>
-            <a:off x="841248" y="3108960"/>
-            <a:ext cx="10799064" cy="457200"/>
+            <a:off x="9729216" y="2139696"/>
+            <a:ext cx="1911096" cy="365760"/>
+          </a:xfrm>
+          <a:prstGeom prst="rect">
+            <a:avLst/>
+          </a:prstGeom>
+          <a:noFill/>
+          <a:ln/>
+        </p:spPr>
+        <p:txBody>
+          <a:bodyPr wrap="square" lIns="0" tIns="0" rIns="0" bIns="0" rtlCol="0" anchor="ctr"/>
+          <a:lstStyle/>
+          <a:p>
+            <a:pPr algn="r" indent="0" marL="0">
+              <a:buNone/>
+            </a:pPr>
+            <a:r>
+              <a:rPr lang="en-US" sz="1800" b="1" dirty="0">
+                <a:solidFill>
+                  <a:srgbClr val="2A78D6"/>
+                </a:solidFill>
+                <a:latin typeface="Cambria" pitchFamily="34" charset="0"/>
+                <a:ea typeface="Cambria" pitchFamily="34" charset="-122"/>
+                <a:cs typeface="Cambria" pitchFamily="34" charset="-120"/>
+              </a:rPr>
+              <a:t>53.7</a:t>
+            </a:r>
+            <a:endParaRPr lang="en-US" sz="1800" dirty="0"/>
+          </a:p>
+        </p:txBody>
+      </p:sp>
+      <p:sp>
+        <p:nvSpPr>
+          <p:cNvPr id="11" name="Text 8"/>
+          <p:cNvSpPr txBox="1"/>
+          <p:nvPr/>
+        </p:nvSpPr>
+        <p:spPr>
+          <a:xfrm>
+            <a:off x="7818120" y="2487168"/>
+            <a:ext cx="3822192" cy="182880"/>
           </a:xfrm>
           <a:prstGeom prst="rect">
             <a:avLst/>
@@ -3848,7 +3937,380 @@
               <a:buNone/>
             </a:pPr>
             <a:r>
-              <a:rPr lang="en-US" sz="1300" dirty="0">
+              <a:rPr lang="en-US" sz="800" dirty="0">
+                <a:solidFill>
+                  <a:srgbClr val="5C6570"/>
+                </a:solidFill>
+                <a:latin typeface="Calibri" pitchFamily="34" charset="0"/>
+                <a:ea typeface="Calibri" pitchFamily="34" charset="-122"/>
+                <a:cs typeface="Calibri" pitchFamily="34" charset="-120"/>
+              </a:rPr>
+              <a:t>mg/dL</a:t>
+            </a:r>
+            <a:endParaRPr lang="en-US" sz="800" dirty="0"/>
+          </a:p>
+        </p:txBody>
+      </p:sp>
+      <p:sp>
+        <p:nvSpPr>
+          <p:cNvPr id="12" name="Text 9"/>
+          <p:cNvSpPr txBox="1"/>
+          <p:nvPr/>
+        </p:nvSpPr>
+        <p:spPr>
+          <a:xfrm>
+            <a:off x="7818120" y="2852928"/>
+            <a:ext cx="3822192" cy="219456"/>
+          </a:xfrm>
+          <a:prstGeom prst="rect">
+            <a:avLst/>
+          </a:prstGeom>
+          <a:noFill/>
+          <a:ln/>
+        </p:spPr>
+        <p:txBody>
+          <a:bodyPr wrap="square" lIns="0" tIns="0" rIns="0" bIns="0" rtlCol="0" anchor="ctr"/>
+          <a:lstStyle/>
+          <a:p>
+            <a:pPr indent="0" marL="0">
+              <a:buNone/>
+            </a:pPr>
+            <a:r>
+              <a:rPr lang="en-US" sz="1050" b="1" dirty="0">
+                <a:solidFill>
+                  <a:srgbClr val="21295C"/>
+                </a:solidFill>
+                <a:latin typeface="Calibri" pitchFamily="34" charset="0"/>
+                <a:ea typeface="Calibri" pitchFamily="34" charset="-122"/>
+                <a:cs typeface="Calibri" pitchFamily="34" charset="-120"/>
+              </a:rPr>
+              <a:t>変動係数 CV</a:t>
+            </a:r>
+            <a:endParaRPr lang="en-US" sz="1050" dirty="0"/>
+          </a:p>
+        </p:txBody>
+      </p:sp>
+      <p:sp>
+        <p:nvSpPr>
+          <p:cNvPr id="13" name="Text 10"/>
+          <p:cNvSpPr txBox="1"/>
+          <p:nvPr/>
+        </p:nvSpPr>
+        <p:spPr>
+          <a:xfrm>
+            <a:off x="7818120" y="3072384"/>
+            <a:ext cx="1911096" cy="365760"/>
+          </a:xfrm>
+          <a:prstGeom prst="rect">
+            <a:avLst/>
+          </a:prstGeom>
+          <a:noFill/>
+          <a:ln/>
+        </p:spPr>
+        <p:txBody>
+          <a:bodyPr wrap="square" lIns="0" tIns="0" rIns="0" bIns="0" rtlCol="0" anchor="ctr"/>
+          <a:lstStyle/>
+          <a:p>
+            <a:pPr indent="0" marL="0">
+              <a:buNone/>
+            </a:pPr>
+            <a:r>
+              <a:rPr lang="en-US" sz="1800" b="1" dirty="0">
+                <a:solidFill>
+                  <a:srgbClr val="EB6834"/>
+                </a:solidFill>
+                <a:latin typeface="Cambria" pitchFamily="34" charset="0"/>
+                <a:ea typeface="Cambria" pitchFamily="34" charset="-122"/>
+                <a:cs typeface="Cambria" pitchFamily="34" charset="-120"/>
+              </a:rPr>
+              <a:t>14.7%</a:t>
+            </a:r>
+            <a:endParaRPr lang="en-US" sz="1800" dirty="0"/>
+          </a:p>
+        </p:txBody>
+      </p:sp>
+      <p:sp>
+        <p:nvSpPr>
+          <p:cNvPr id="14" name="Text 11"/>
+          <p:cNvSpPr txBox="1"/>
+          <p:nvPr/>
+        </p:nvSpPr>
+        <p:spPr>
+          <a:xfrm>
+            <a:off x="9729216" y="3072384"/>
+            <a:ext cx="1911096" cy="365760"/>
+          </a:xfrm>
+          <a:prstGeom prst="rect">
+            <a:avLst/>
+          </a:prstGeom>
+          <a:noFill/>
+          <a:ln/>
+        </p:spPr>
+        <p:txBody>
+          <a:bodyPr wrap="square" lIns="0" tIns="0" rIns="0" bIns="0" rtlCol="0" anchor="ctr"/>
+          <a:lstStyle/>
+          <a:p>
+            <a:pPr algn="r" indent="0" marL="0">
+              <a:buNone/>
+            </a:pPr>
+            <a:r>
+              <a:rPr lang="en-US" sz="1800" b="1" dirty="0">
+                <a:solidFill>
+                  <a:srgbClr val="2A78D6"/>
+                </a:solidFill>
+                <a:latin typeface="Cambria" pitchFamily="34" charset="0"/>
+                <a:ea typeface="Cambria" pitchFamily="34" charset="-122"/>
+                <a:cs typeface="Cambria" pitchFamily="34" charset="-120"/>
+              </a:rPr>
+              <a:t>11.2%</a:t>
+            </a:r>
+            <a:endParaRPr lang="en-US" sz="1800" dirty="0"/>
+          </a:p>
+        </p:txBody>
+      </p:sp>
+      <p:sp>
+        <p:nvSpPr>
+          <p:cNvPr id="15" name="Text 12"/>
+          <p:cNvSpPr txBox="1"/>
+          <p:nvPr/>
+        </p:nvSpPr>
+        <p:spPr>
+          <a:xfrm>
+            <a:off x="7818120" y="3785616"/>
+            <a:ext cx="3822192" cy="219456"/>
+          </a:xfrm>
+          <a:prstGeom prst="rect">
+            <a:avLst/>
+          </a:prstGeom>
+          <a:noFill/>
+          <a:ln/>
+        </p:spPr>
+        <p:txBody>
+          <a:bodyPr wrap="square" lIns="0" tIns="0" rIns="0" bIns="0" rtlCol="0" anchor="ctr"/>
+          <a:lstStyle/>
+          <a:p>
+            <a:pPr indent="0" marL="0">
+              <a:buNone/>
+            </a:pPr>
+            <a:r>
+              <a:rPr lang="en-US" sz="1050" b="1" dirty="0">
+                <a:solidFill>
+                  <a:srgbClr val="21295C"/>
+                </a:solidFill>
+                <a:latin typeface="Calibri" pitchFamily="34" charset="0"/>
+                <a:ea typeface="Calibri" pitchFamily="34" charset="-122"/>
+                <a:cs typeface="Calibri" pitchFamily="34" charset="-120"/>
+              </a:rPr>
+              <a:t>練習中(11-14h)平均血糖</a:t>
+            </a:r>
+            <a:endParaRPr lang="en-US" sz="1050" dirty="0"/>
+          </a:p>
+        </p:txBody>
+      </p:sp>
+      <p:sp>
+        <p:nvSpPr>
+          <p:cNvPr id="16" name="Text 13"/>
+          <p:cNvSpPr txBox="1"/>
+          <p:nvPr/>
+        </p:nvSpPr>
+        <p:spPr>
+          <a:xfrm>
+            <a:off x="7818120" y="4005072"/>
+            <a:ext cx="1911096" cy="365760"/>
+          </a:xfrm>
+          <a:prstGeom prst="rect">
+            <a:avLst/>
+          </a:prstGeom>
+          <a:noFill/>
+          <a:ln/>
+        </p:spPr>
+        <p:txBody>
+          <a:bodyPr wrap="square" lIns="0" tIns="0" rIns="0" bIns="0" rtlCol="0" anchor="ctr"/>
+          <a:lstStyle/>
+          <a:p>
+            <a:pPr indent="0" marL="0">
+              <a:buNone/>
+            </a:pPr>
+            <a:r>
+              <a:rPr lang="en-US" sz="1800" b="1" dirty="0">
+                <a:solidFill>
+                  <a:srgbClr val="EB6834"/>
+                </a:solidFill>
+                <a:latin typeface="Cambria" pitchFamily="34" charset="0"/>
+                <a:ea typeface="Cambria" pitchFamily="34" charset="-122"/>
+                <a:cs typeface="Cambria" pitchFamily="34" charset="-120"/>
+              </a:rPr>
+              <a:t>222.1</a:t>
+            </a:r>
+            <a:endParaRPr lang="en-US" sz="1800" dirty="0"/>
+          </a:p>
+        </p:txBody>
+      </p:sp>
+      <p:sp>
+        <p:nvSpPr>
+          <p:cNvPr id="17" name="Text 14"/>
+          <p:cNvSpPr txBox="1"/>
+          <p:nvPr/>
+        </p:nvSpPr>
+        <p:spPr>
+          <a:xfrm>
+            <a:off x="9729216" y="4005072"/>
+            <a:ext cx="1911096" cy="365760"/>
+          </a:xfrm>
+          <a:prstGeom prst="rect">
+            <a:avLst/>
+          </a:prstGeom>
+          <a:noFill/>
+          <a:ln/>
+        </p:spPr>
+        <p:txBody>
+          <a:bodyPr wrap="square" lIns="0" tIns="0" rIns="0" bIns="0" rtlCol="0" anchor="ctr"/>
+          <a:lstStyle/>
+          <a:p>
+            <a:pPr algn="r" indent="0" marL="0">
+              <a:buNone/>
+            </a:pPr>
+            <a:r>
+              <a:rPr lang="en-US" sz="1800" b="1" dirty="0">
+                <a:solidFill>
+                  <a:srgbClr val="2A78D6"/>
+                </a:solidFill>
+                <a:latin typeface="Cambria" pitchFamily="34" charset="0"/>
+                <a:ea typeface="Cambria" pitchFamily="34" charset="-122"/>
+                <a:cs typeface="Cambria" pitchFamily="34" charset="-120"/>
+              </a:rPr>
+              <a:t>135.1</a:t>
+            </a:r>
+            <a:endParaRPr lang="en-US" sz="1800" dirty="0"/>
+          </a:p>
+        </p:txBody>
+      </p:sp>
+      <p:sp>
+        <p:nvSpPr>
+          <p:cNvPr id="18" name="Text 15"/>
+          <p:cNvSpPr txBox="1"/>
+          <p:nvPr/>
+        </p:nvSpPr>
+        <p:spPr>
+          <a:xfrm>
+            <a:off x="7818120" y="4352544"/>
+            <a:ext cx="3822192" cy="182880"/>
+          </a:xfrm>
+          <a:prstGeom prst="rect">
+            <a:avLst/>
+          </a:prstGeom>
+          <a:noFill/>
+          <a:ln/>
+        </p:spPr>
+        <p:txBody>
+          <a:bodyPr wrap="square" lIns="0" tIns="0" rIns="0" bIns="0" rtlCol="0" anchor="ctr"/>
+          <a:lstStyle/>
+          <a:p>
+            <a:pPr indent="0" marL="0">
+              <a:buNone/>
+            </a:pPr>
+            <a:r>
+              <a:rPr lang="en-US" sz="800" dirty="0">
+                <a:solidFill>
+                  <a:srgbClr val="5C6570"/>
+                </a:solidFill>
+                <a:latin typeface="Calibri" pitchFamily="34" charset="0"/>
+                <a:ea typeface="Calibri" pitchFamily="34" charset="-122"/>
+                <a:cs typeface="Calibri" pitchFamily="34" charset="-120"/>
+              </a:rPr>
+              <a:t>mg/dL＝燃料供給</a:t>
+            </a:r>
+            <a:endParaRPr lang="en-US" sz="800" dirty="0"/>
+          </a:p>
+        </p:txBody>
+      </p:sp>
+      <p:sp>
+        <p:nvSpPr>
+          <p:cNvPr id="19" name="Text 16"/>
+          <p:cNvSpPr txBox="1"/>
+          <p:nvPr/>
+        </p:nvSpPr>
+        <p:spPr>
+          <a:xfrm>
+            <a:off x="7818120" y="4736592"/>
+            <a:ext cx="3822192" cy="274320"/>
+          </a:xfrm>
+          <a:prstGeom prst="rect">
+            <a:avLst/>
+          </a:prstGeom>
+          <a:noFill/>
+          <a:ln/>
+        </p:spPr>
+        <p:txBody>
+          <a:bodyPr wrap="square" lIns="0" tIns="0" rIns="0" bIns="0" rtlCol="0" anchor="ctr"/>
+          <a:lstStyle/>
+          <a:p>
+            <a:pPr indent="0" marL="0">
+              <a:buNone/>
+            </a:pPr>
+            <a:r>
+              <a:rPr lang="en-US" sz="900" dirty="0">
+                <a:solidFill>
+                  <a:srgbClr val="5C6570"/>
+                </a:solidFill>
+                <a:latin typeface="Calibri" pitchFamily="34" charset="0"/>
+                <a:ea typeface="Calibri" pitchFamily="34" charset="-122"/>
+                <a:cs typeface="Calibri" pitchFamily="34" charset="-120"/>
+              </a:rPr>
+              <a:t>上＝スムージー／下＝固形</a:t>
+            </a:r>
+            <a:endParaRPr lang="en-US" sz="900" dirty="0"/>
+          </a:p>
+        </p:txBody>
+      </p:sp>
+      <p:sp>
+        <p:nvSpPr>
+          <p:cNvPr id="20" name="Shape 17"/>
+          <p:cNvSpPr/>
+          <p:nvPr/>
+        </p:nvSpPr>
+        <p:spPr>
+          <a:xfrm>
+            <a:off x="548640" y="5303520"/>
+            <a:ext cx="11091672" cy="960120"/>
+          </a:xfrm>
+          <a:prstGeom prst="roundRect">
+            <a:avLst>
+              <a:gd name="adj" fmla="val 9524"/>
+            </a:avLst>
+          </a:prstGeom>
+          <a:solidFill>
+            <a:srgbClr val="F4F7F9"/>
+          </a:solidFill>
+          <a:ln/>
+        </p:spPr>
+      </p:sp>
+      <p:sp>
+        <p:nvSpPr>
+          <p:cNvPr id="21" name="Text 18"/>
+          <p:cNvSpPr txBox="1"/>
+          <p:nvPr/>
+        </p:nvSpPr>
+        <p:spPr>
+          <a:xfrm>
+            <a:off x="777240" y="5394960"/>
+            <a:ext cx="10634472" cy="777240"/>
+          </a:xfrm>
+          <a:prstGeom prst="rect">
+            <a:avLst/>
+          </a:prstGeom>
+          <a:noFill/>
+          <a:ln/>
+        </p:spPr>
+        <p:txBody>
+          <a:bodyPr wrap="square" lIns="0" tIns="0" rIns="0" bIns="0" rtlCol="0" anchor="ctr"/>
+          <a:lstStyle/>
+          <a:p>
+            <a:pPr indent="0" marL="0">
+              <a:buNone/>
+            </a:pPr>
+            <a:r>
+              <a:rPr lang="en-US" sz="1100" dirty="0">
                 <a:solidFill>
                   <a:srgbClr val="1A1A1A"/>
                 </a:solidFill>
@@ -3856,42 +4318,22 @@
                 <a:ea typeface="Calibri" pitchFamily="34" charset="-122"/>
                 <a:cs typeface="Calibri" pitchFamily="34" charset="-120"/>
               </a:rPr>
-              <a:t>練習中（11:00〜14:00）に使える血糖＝燃料がスムージーの方が圧倒的に多い（222 vs 135 mg/dL）</a:t>
-            </a:r>
-            <a:endParaRPr lang="en-US" sz="1300" dirty="0"/>
-          </a:p>
-        </p:txBody>
-      </p:sp>
-      <p:sp>
-        <p:nvSpPr>
-          <p:cNvPr id="12" name="Shape 10"/>
+              <a:t>自覚コンディション・毎日のコンディション：頭痛・吐き気はどちらも全時点で最小値、満腹感・食欲もほぼ同水準。夜間コンディション（起床時・睡眠）にも大きな差はない（ただし練習時間がスムージー60分/日・固形140分/日と大きく異なり、RPE等は練習量の交絡を強く受ける）。</a:t>
+            </a:r>
+            <a:endParaRPr lang="en-US" sz="1100" dirty="0"/>
+          </a:p>
+        </p:txBody>
+      </p:sp>
+      <p:sp>
+        <p:nvSpPr>
+          <p:cNvPr id="22" name="Text 19"/>
           <p:cNvSpPr/>
           <p:nvPr/>
         </p:nvSpPr>
         <p:spPr>
           <a:xfrm>
-            <a:off x="548640" y="3730752"/>
-            <a:ext cx="109728" cy="109728"/>
-          </a:xfrm>
-          <a:prstGeom prst="oval">
-            <a:avLst/>
-          </a:prstGeom>
-          <a:solidFill>
-            <a:srgbClr val="EB6834"/>
-          </a:solidFill>
-          <a:ln/>
-        </p:spPr>
-      </p:sp>
-      <p:sp>
-        <p:nvSpPr>
-          <p:cNvPr id="13" name="Text 11"/>
-          <p:cNvSpPr txBox="1"/>
-          <p:nvPr/>
-        </p:nvSpPr>
-        <p:spPr>
-          <a:xfrm>
-            <a:off x="841248" y="3675888"/>
-            <a:ext cx="10799064" cy="457200"/>
+            <a:off x="548640" y="6492240"/>
+            <a:ext cx="11091672" cy="256032"/>
           </a:xfrm>
           <a:prstGeom prst="rect">
             <a:avLst/>
@@ -3900,208 +4342,24 @@
           <a:ln/>
         </p:spPr>
         <p:txBody>
-          <a:bodyPr wrap="square" lIns="0" tIns="0" rIns="0" bIns="0" rtlCol="0" anchor="ctr"/>
-          <a:lstStyle/>
-          <a:p>
-            <a:pPr indent="0" marL="0">
+          <a:bodyPr wrap="square" rtlCol="0" anchor="ctr"/>
+          <a:lstStyle/>
+          <a:p>
+            <a:pPr algn="l" indent="0" marL="0">
               <a:buNone/>
             </a:pPr>
             <a:r>
-              <a:rPr lang="en-US" sz="1300" dirty="0">
+              <a:rPr lang="en-US" sz="950" dirty="0">
                 <a:solidFill>
-                  <a:srgbClr val="1A1A1A"/>
+                  <a:srgbClr val="5C6570"/>
                 </a:solidFill>
                 <a:latin typeface="Calibri" pitchFamily="34" charset="0"/>
                 <a:ea typeface="Calibri" pitchFamily="34" charset="-122"/>
                 <a:cs typeface="Calibri" pitchFamily="34" charset="-120"/>
               </a:rPr>
-              <a:t>頭痛・吐き気などの不調は出ておらず、反応性低血糖（急降下）も起きていない</a:t>
-            </a:r>
-            <a:endParaRPr lang="en-US" sz="1300" dirty="0"/>
-          </a:p>
-        </p:txBody>
-      </p:sp>
-      <p:sp>
-        <p:nvSpPr>
-          <p:cNvPr id="14" name="Shape 12"/>
-          <p:cNvSpPr/>
-          <p:nvPr/>
-        </p:nvSpPr>
-        <p:spPr>
-          <a:xfrm>
-            <a:off x="548640" y="4297680"/>
-            <a:ext cx="109728" cy="109728"/>
-          </a:xfrm>
-          <a:prstGeom prst="oval">
-            <a:avLst/>
-          </a:prstGeom>
-          <a:solidFill>
-            <a:srgbClr val="EB6834"/>
-          </a:solidFill>
-          <a:ln/>
-        </p:spPr>
-      </p:sp>
-      <p:sp>
-        <p:nvSpPr>
-          <p:cNvPr id="15" name="Text 13"/>
-          <p:cNvSpPr txBox="1"/>
-          <p:nvPr/>
-        </p:nvSpPr>
-        <p:spPr>
-          <a:xfrm>
-            <a:off x="841248" y="4242816"/>
-            <a:ext cx="10799064" cy="457200"/>
-          </a:xfrm>
-          <a:prstGeom prst="rect">
-            <a:avLst/>
-          </a:prstGeom>
-          <a:noFill/>
-          <a:ln/>
-        </p:spPr>
-        <p:txBody>
-          <a:bodyPr wrap="square" lIns="0" tIns="0" rIns="0" bIns="0" rtlCol="0" anchor="ctr"/>
-          <a:lstStyle/>
-          <a:p>
-            <a:pPr indent="0" marL="0">
-              <a:buNone/>
-            </a:pPr>
-            <a:r>
-              <a:rPr lang="en-US" sz="1300" dirty="0">
-                <a:solidFill>
-                  <a:srgbClr val="1A1A1A"/>
-                </a:solidFill>
-                <a:latin typeface="Calibri" pitchFamily="34" charset="0"/>
-                <a:ea typeface="Calibri" pitchFamily="34" charset="-122"/>
-                <a:cs typeface="Calibri" pitchFamily="34" charset="-120"/>
-              </a:rPr>
-              <a:t>血糖の乱高下（CV・Δピーク）は固形の方が小さいが、実害（症状・クラッシュ）にはつながっていない</a:t>
-            </a:r>
-            <a:endParaRPr lang="en-US" sz="1300" dirty="0"/>
-          </a:p>
-        </p:txBody>
-      </p:sp>
-      <p:sp>
-        <p:nvSpPr>
-          <p:cNvPr id="16" name="Shape 14"/>
-          <p:cNvSpPr/>
-          <p:nvPr/>
-        </p:nvSpPr>
-        <p:spPr>
-          <a:xfrm>
-            <a:off x="548640" y="4864608"/>
-            <a:ext cx="109728" cy="109728"/>
-          </a:xfrm>
-          <a:prstGeom prst="oval">
-            <a:avLst/>
-          </a:prstGeom>
-          <a:solidFill>
-            <a:srgbClr val="EB6834"/>
-          </a:solidFill>
-          <a:ln/>
-        </p:spPr>
-      </p:sp>
-      <p:sp>
-        <p:nvSpPr>
-          <p:cNvPr id="17" name="Text 15"/>
-          <p:cNvSpPr txBox="1"/>
-          <p:nvPr/>
-        </p:nvSpPr>
-        <p:spPr>
-          <a:xfrm>
-            <a:off x="841248" y="4809744"/>
-            <a:ext cx="10799064" cy="457200"/>
-          </a:xfrm>
-          <a:prstGeom prst="rect">
-            <a:avLst/>
-          </a:prstGeom>
-          <a:noFill/>
-          <a:ln/>
-        </p:spPr>
-        <p:txBody>
-          <a:bodyPr wrap="square" lIns="0" tIns="0" rIns="0" bIns="0" rtlCol="0" anchor="ctr"/>
-          <a:lstStyle/>
-          <a:p>
-            <a:pPr indent="0" marL="0">
-              <a:buNone/>
-            </a:pPr>
-            <a:r>
-              <a:rPr lang="en-US" sz="1300" dirty="0">
-                <a:solidFill>
-                  <a:srgbClr val="1A1A1A"/>
-                </a:solidFill>
-                <a:latin typeface="Calibri" pitchFamily="34" charset="0"/>
-                <a:ea typeface="Calibri" pitchFamily="34" charset="-122"/>
-                <a:cs typeface="Calibri" pitchFamily="34" charset="-120"/>
-              </a:rPr>
-              <a:t>選手自身が語っていた「スムージー化で出力が上がった」という体感とも一致する</a:t>
-            </a:r>
-            <a:endParaRPr lang="en-US" sz="1300" dirty="0"/>
-          </a:p>
-        </p:txBody>
-      </p:sp>
-      <p:sp>
-        <p:nvSpPr>
-          <p:cNvPr id="18" name="Shape 16"/>
-          <p:cNvSpPr/>
-          <p:nvPr/>
-        </p:nvSpPr>
-        <p:spPr>
-          <a:xfrm>
-            <a:off x="548640" y="5623560"/>
-            <a:ext cx="11091672" cy="868680"/>
-          </a:xfrm>
-          <a:prstGeom prst="roundRect">
-            <a:avLst>
-              <a:gd name="adj" fmla="val 10526"/>
-            </a:avLst>
-          </a:prstGeom>
-          <a:solidFill>
-            <a:srgbClr val="FDF3E2"/>
-          </a:solidFill>
-          <a:ln w="12700">
-            <a:solidFill>
-              <a:srgbClr val="EDA100"/>
-            </a:solidFill>
-            <a:prstDash val="solid"/>
-          </a:ln>
-        </p:spPr>
-      </p:sp>
-      <p:sp>
-        <p:nvSpPr>
-          <p:cNvPr id="19" name="Text 17"/>
-          <p:cNvSpPr txBox="1"/>
-          <p:nvPr/>
-        </p:nvSpPr>
-        <p:spPr>
-          <a:xfrm>
-            <a:off x="777240" y="5742432"/>
-            <a:ext cx="10634472" cy="640080"/>
-          </a:xfrm>
-          <a:prstGeom prst="rect">
-            <a:avLst/>
-          </a:prstGeom>
-          <a:noFill/>
-          <a:ln/>
-        </p:spPr>
-        <p:txBody>
-          <a:bodyPr wrap="square" lIns="0" tIns="0" rIns="0" bIns="0" rtlCol="0" anchor="ctr"/>
-          <a:lstStyle/>
-          <a:p>
-            <a:pPr indent="0" marL="0">
-              <a:buNone/>
-            </a:pPr>
-            <a:r>
-              <a:rPr lang="en-US" sz="1250" b="1" dirty="0">
-                <a:solidFill>
-                  <a:srgbClr val="6B4B00"/>
-                </a:solidFill>
-                <a:latin typeface="Calibri" pitchFamily="34" charset="0"/>
-                <a:ea typeface="Calibri" pitchFamily="34" charset="-122"/>
-                <a:cs typeface="Calibri" pitchFamily="34" charset="-120"/>
-              </a:rPr>
-              <a:t>→ ただし最終的には「スムージー単体」よりも「おにぎりと同時に食べる」方がさらに良い結果でした（Q2で解説）。</a:t>
-            </a:r>
-            <a:endParaRPr lang="en-US" sz="1250" dirty="0"/>
+              <a:t>15分間隔・条件ごとの平均血糖値（各条件3日間平均）。</a:t>
+            </a:r>
+            <a:endParaRPr lang="en-US" sz="950" dirty="0"/>
           </a:p>
         </p:txBody>
       </p:sp>
@@ -4170,6 +4428,689 @@
                 <a:ea typeface="Calibri" pitchFamily="34" charset="-122"/>
                 <a:cs typeface="Calibri" pitchFamily="34" charset="-120"/>
               </a:rPr>
+              <a:t>Q1 – DISCUSSION</a:t>
+            </a:r>
+            <a:endParaRPr lang="en-US" sz="1250" dirty="0"/>
+          </a:p>
+        </p:txBody>
+      </p:sp>
+      <p:sp>
+        <p:nvSpPr>
+          <p:cNvPr id="3" name="Text 1"/>
+          <p:cNvSpPr txBox="1"/>
+          <p:nvPr/>
+        </p:nvSpPr>
+        <p:spPr>
+          <a:xfrm>
+            <a:off x="548640" y="676656"/>
+            <a:ext cx="11091672" cy="594360"/>
+          </a:xfrm>
+          <a:prstGeom prst="rect">
+            <a:avLst/>
+          </a:prstGeom>
+          <a:noFill/>
+          <a:ln/>
+        </p:spPr>
+        <p:txBody>
+          <a:bodyPr wrap="square" rtlCol="0" anchor="ctr"/>
+          <a:lstStyle/>
+          <a:p>
+            <a:pPr indent="0" marL="0">
+              <a:buNone/>
+            </a:pPr>
+            <a:r>
+              <a:rPr lang="en-US" sz="2600" b="1" dirty="0">
+                <a:solidFill>
+                  <a:srgbClr val="21295C"/>
+                </a:solidFill>
+                <a:latin typeface="Cambria" pitchFamily="34" charset="0"/>
+                <a:ea typeface="Cambria" pitchFamily="34" charset="-122"/>
+                <a:cs typeface="Cambria" pitchFamily="34" charset="-120"/>
+              </a:rPr>
+              <a:t>固形 vs スムージー：考察と結論</a:t>
+            </a:r>
+            <a:endParaRPr lang="en-US" sz="2600" dirty="0"/>
+          </a:p>
+        </p:txBody>
+      </p:sp>
+      <p:sp>
+        <p:nvSpPr>
+          <p:cNvPr id="4" name="Shape 2"/>
+          <p:cNvSpPr/>
+          <p:nvPr/>
+        </p:nvSpPr>
+        <p:spPr>
+          <a:xfrm>
+            <a:off x="548640" y="1298448"/>
+            <a:ext cx="11091672" cy="384048"/>
+          </a:xfrm>
+          <a:prstGeom prst="roundRect">
+            <a:avLst>
+              <a:gd name="adj" fmla="val 19048"/>
+            </a:avLst>
+          </a:prstGeom>
+          <a:solidFill>
+            <a:srgbClr val="F4F7F9"/>
+          </a:solidFill>
+          <a:ln/>
+        </p:spPr>
+      </p:sp>
+      <p:sp>
+        <p:nvSpPr>
+          <p:cNvPr id="5" name="Text 3"/>
+          <p:cNvSpPr txBox="1"/>
+          <p:nvPr/>
+        </p:nvSpPr>
+        <p:spPr>
+          <a:xfrm>
+            <a:off x="685800" y="1298448"/>
+            <a:ext cx="548640" cy="384048"/>
+          </a:xfrm>
+          <a:prstGeom prst="rect">
+            <a:avLst/>
+          </a:prstGeom>
+          <a:noFill/>
+          <a:ln/>
+        </p:spPr>
+        <p:txBody>
+          <a:bodyPr wrap="square" lIns="0" tIns="0" rIns="0" bIns="0" rtlCol="0" anchor="ctr"/>
+          <a:lstStyle/>
+          <a:p>
+            <a:pPr algn="ctr" indent="0" marL="0">
+              <a:buNone/>
+            </a:pPr>
+            <a:r>
+              <a:rPr lang="en-US" sz="1400" b="1" dirty="0">
+                <a:solidFill>
+                  <a:srgbClr val="1C7293"/>
+                </a:solidFill>
+                <a:latin typeface="Cambria" pitchFamily="34" charset="0"/>
+                <a:ea typeface="Cambria" pitchFamily="34" charset="-122"/>
+                <a:cs typeface="Cambria" pitchFamily="34" charset="-120"/>
+              </a:rPr>
+              <a:t>Q1</a:t>
+            </a:r>
+            <a:endParaRPr lang="en-US" sz="1400" dirty="0"/>
+          </a:p>
+        </p:txBody>
+      </p:sp>
+      <p:sp>
+        <p:nvSpPr>
+          <p:cNvPr id="6" name="Text 4"/>
+          <p:cNvSpPr txBox="1"/>
+          <p:nvPr/>
+        </p:nvSpPr>
+        <p:spPr>
+          <a:xfrm>
+            <a:off x="1280160" y="1298448"/>
+            <a:ext cx="10177272" cy="384048"/>
+          </a:xfrm>
+          <a:prstGeom prst="rect">
+            <a:avLst/>
+          </a:prstGeom>
+          <a:noFill/>
+          <a:ln/>
+        </p:spPr>
+        <p:txBody>
+          <a:bodyPr wrap="square" lIns="0" tIns="0" rIns="0" bIns="0" rtlCol="0" anchor="ctr"/>
+          <a:lstStyle/>
+          <a:p>
+            <a:pPr indent="0" marL="0">
+              <a:buNone/>
+            </a:pPr>
+            <a:r>
+              <a:rPr lang="en-US" sz="1300" dirty="0">
+                <a:solidFill>
+                  <a:srgbClr val="21295C"/>
+                </a:solidFill>
+                <a:latin typeface="Calibri" pitchFamily="34" charset="0"/>
+                <a:ea typeface="Calibri" pitchFamily="34" charset="-122"/>
+                <a:cs typeface="Calibri" pitchFamily="34" charset="-120"/>
+              </a:rPr>
+              <a:t>固形が良いのか、スムージーが良いのか？</a:t>
+            </a:r>
+            <a:endParaRPr lang="en-US" sz="1300" dirty="0"/>
+          </a:p>
+        </p:txBody>
+      </p:sp>
+      <p:sp>
+        <p:nvSpPr>
+          <p:cNvPr id="7" name="Shape 5"/>
+          <p:cNvSpPr/>
+          <p:nvPr/>
+        </p:nvSpPr>
+        <p:spPr>
+          <a:xfrm>
+            <a:off x="548640" y="1874520"/>
+            <a:ext cx="11091672" cy="1051560"/>
+          </a:xfrm>
+          <a:prstGeom prst="roundRect">
+            <a:avLst>
+              <a:gd name="adj" fmla="val 10435"/>
+            </a:avLst>
+          </a:prstGeom>
+          <a:solidFill>
+            <a:srgbClr val="EAF7F0"/>
+          </a:solidFill>
+          <a:ln w="15875">
+            <a:solidFill>
+              <a:srgbClr val="EB6834"/>
+            </a:solidFill>
+            <a:prstDash val="solid"/>
+          </a:ln>
+        </p:spPr>
+      </p:sp>
+      <p:sp>
+        <p:nvSpPr>
+          <p:cNvPr id="8" name="Text 6"/>
+          <p:cNvSpPr txBox="1"/>
+          <p:nvPr/>
+        </p:nvSpPr>
+        <p:spPr>
+          <a:xfrm>
+            <a:off x="822960" y="1984248"/>
+            <a:ext cx="1828800" cy="274320"/>
+          </a:xfrm>
+          <a:prstGeom prst="rect">
+            <a:avLst/>
+          </a:prstGeom>
+          <a:noFill/>
+          <a:ln/>
+        </p:spPr>
+        <p:txBody>
+          <a:bodyPr wrap="square" lIns="0" tIns="0" rIns="0" bIns="0" rtlCol="0" anchor="ctr"/>
+          <a:lstStyle/>
+          <a:p>
+            <a:pPr indent="0" marL="0">
+              <a:buNone/>
+            </a:pPr>
+            <a:r>
+              <a:rPr lang="en-US" sz="1200" b="1" dirty="0">
+                <a:solidFill>
+                  <a:srgbClr val="0F5C3D"/>
+                </a:solidFill>
+                <a:latin typeface="Calibri" pitchFamily="34" charset="0"/>
+                <a:ea typeface="Calibri" pitchFamily="34" charset="-122"/>
+                <a:cs typeface="Calibri" pitchFamily="34" charset="-120"/>
+              </a:rPr>
+              <a:t>✓ 答え</a:t>
+            </a:r>
+            <a:endParaRPr lang="en-US" sz="1200" dirty="0"/>
+          </a:p>
+        </p:txBody>
+      </p:sp>
+      <p:sp>
+        <p:nvSpPr>
+          <p:cNvPr id="9" name="Text 7"/>
+          <p:cNvSpPr txBox="1"/>
+          <p:nvPr/>
+        </p:nvSpPr>
+        <p:spPr>
+          <a:xfrm>
+            <a:off x="822960" y="2258568"/>
+            <a:ext cx="10543032" cy="548640"/>
+          </a:xfrm>
+          <a:prstGeom prst="rect">
+            <a:avLst/>
+          </a:prstGeom>
+          <a:noFill/>
+          <a:ln/>
+        </p:spPr>
+        <p:txBody>
+          <a:bodyPr wrap="square" lIns="0" tIns="0" rIns="0" bIns="0" rtlCol="0" anchor="ctr"/>
+          <a:lstStyle/>
+          <a:p>
+            <a:pPr indent="0" marL="0">
+              <a:buNone/>
+            </a:pPr>
+            <a:r>
+              <a:rPr lang="en-US" sz="2000" b="1" dirty="0">
+                <a:solidFill>
+                  <a:srgbClr val="0F5C3D"/>
+                </a:solidFill>
+                <a:latin typeface="Cambria" pitchFamily="34" charset="0"/>
+                <a:ea typeface="Cambria" pitchFamily="34" charset="-122"/>
+                <a:cs typeface="Cambria" pitchFamily="34" charset="-120"/>
+              </a:rPr>
+              <a:t>スムージーの方が良い</a:t>
+            </a:r>
+            <a:endParaRPr lang="en-US" sz="2000" dirty="0"/>
+          </a:p>
+        </p:txBody>
+      </p:sp>
+      <p:sp>
+        <p:nvSpPr>
+          <p:cNvPr id="10" name="Shape 8"/>
+          <p:cNvSpPr/>
+          <p:nvPr/>
+        </p:nvSpPr>
+        <p:spPr>
+          <a:xfrm>
+            <a:off x="7708392" y="1984248"/>
+            <a:ext cx="3931920" cy="310896"/>
+          </a:xfrm>
+          <a:prstGeom prst="roundRect">
+            <a:avLst>
+              <a:gd name="adj" fmla="val 20588"/>
+            </a:avLst>
+          </a:prstGeom>
+          <a:solidFill>
+            <a:srgbClr val="FDF3E2"/>
+          </a:solidFill>
+          <a:ln w="9525">
+            <a:solidFill>
+              <a:srgbClr val="6B4B00"/>
+            </a:solidFill>
+            <a:prstDash val="solid"/>
+          </a:ln>
+        </p:spPr>
+      </p:sp>
+      <p:sp>
+        <p:nvSpPr>
+          <p:cNvPr id="11" name="Text 9"/>
+          <p:cNvSpPr txBox="1"/>
+          <p:nvPr/>
+        </p:nvSpPr>
+        <p:spPr>
+          <a:xfrm>
+            <a:off x="7799832" y="1984248"/>
+            <a:ext cx="3749040" cy="310896"/>
+          </a:xfrm>
+          <a:prstGeom prst="rect">
+            <a:avLst/>
+          </a:prstGeom>
+          <a:noFill/>
+          <a:ln/>
+        </p:spPr>
+        <p:txBody>
+          <a:bodyPr wrap="square" lIns="0" tIns="0" rIns="0" bIns="0" rtlCol="0" anchor="ctr"/>
+          <a:lstStyle/>
+          <a:p>
+            <a:pPr algn="ctr" indent="0" marL="0">
+              <a:buNone/>
+            </a:pPr>
+            <a:r>
+              <a:rPr lang="en-US" sz="950" b="1" dirty="0">
+                <a:solidFill>
+                  <a:srgbClr val="6B4B00"/>
+                </a:solidFill>
+                <a:latin typeface="Calibri" pitchFamily="34" charset="0"/>
+                <a:ea typeface="Calibri" pitchFamily="34" charset="-122"/>
+                <a:cs typeface="Calibri" pitchFamily="34" charset="-120"/>
+              </a:rPr>
+              <a:t>⚠ 血糖シフトの影響で参考値</a:t>
+            </a:r>
+            <a:endParaRPr lang="en-US" sz="950" dirty="0"/>
+          </a:p>
+        </p:txBody>
+      </p:sp>
+      <p:sp>
+        <p:nvSpPr>
+          <p:cNvPr id="12" name="Shape 10"/>
+          <p:cNvSpPr/>
+          <p:nvPr/>
+        </p:nvSpPr>
+        <p:spPr>
+          <a:xfrm>
+            <a:off x="548640" y="3163824"/>
+            <a:ext cx="109728" cy="109728"/>
+          </a:xfrm>
+          <a:prstGeom prst="oval">
+            <a:avLst/>
+          </a:prstGeom>
+          <a:solidFill>
+            <a:srgbClr val="EB6834"/>
+          </a:solidFill>
+          <a:ln/>
+        </p:spPr>
+      </p:sp>
+      <p:sp>
+        <p:nvSpPr>
+          <p:cNvPr id="13" name="Text 11"/>
+          <p:cNvSpPr txBox="1"/>
+          <p:nvPr/>
+        </p:nvSpPr>
+        <p:spPr>
+          <a:xfrm>
+            <a:off x="841248" y="3108960"/>
+            <a:ext cx="10799064" cy="457200"/>
+          </a:xfrm>
+          <a:prstGeom prst="rect">
+            <a:avLst/>
+          </a:prstGeom>
+          <a:noFill/>
+          <a:ln/>
+        </p:spPr>
+        <p:txBody>
+          <a:bodyPr wrap="square" lIns="0" tIns="0" rIns="0" bIns="0" rtlCol="0" anchor="ctr"/>
+          <a:lstStyle/>
+          <a:p>
+            <a:pPr indent="0" marL="0">
+              <a:buNone/>
+            </a:pPr>
+            <a:r>
+              <a:rPr lang="en-US" sz="1300" dirty="0">
+                <a:solidFill>
+                  <a:srgbClr val="1A1A1A"/>
+                </a:solidFill>
+                <a:latin typeface="Calibri" pitchFamily="34" charset="0"/>
+                <a:ea typeface="Calibri" pitchFamily="34" charset="-122"/>
+                <a:cs typeface="Calibri" pitchFamily="34" charset="-120"/>
+              </a:rPr>
+              <a:t>練習中（11:00〜14:00）に使える血糖＝燃料がスムージーの方が圧倒的に多い（222 vs 135 mg/dL）</a:t>
+            </a:r>
+            <a:endParaRPr lang="en-US" sz="1300" dirty="0"/>
+          </a:p>
+        </p:txBody>
+      </p:sp>
+      <p:sp>
+        <p:nvSpPr>
+          <p:cNvPr id="14" name="Shape 12"/>
+          <p:cNvSpPr/>
+          <p:nvPr/>
+        </p:nvSpPr>
+        <p:spPr>
+          <a:xfrm>
+            <a:off x="548640" y="3730752"/>
+            <a:ext cx="109728" cy="109728"/>
+          </a:xfrm>
+          <a:prstGeom prst="oval">
+            <a:avLst/>
+          </a:prstGeom>
+          <a:solidFill>
+            <a:srgbClr val="EB6834"/>
+          </a:solidFill>
+          <a:ln/>
+        </p:spPr>
+      </p:sp>
+      <p:sp>
+        <p:nvSpPr>
+          <p:cNvPr id="15" name="Text 13"/>
+          <p:cNvSpPr txBox="1"/>
+          <p:nvPr/>
+        </p:nvSpPr>
+        <p:spPr>
+          <a:xfrm>
+            <a:off x="841248" y="3675888"/>
+            <a:ext cx="10799064" cy="457200"/>
+          </a:xfrm>
+          <a:prstGeom prst="rect">
+            <a:avLst/>
+          </a:prstGeom>
+          <a:noFill/>
+          <a:ln/>
+        </p:spPr>
+        <p:txBody>
+          <a:bodyPr wrap="square" lIns="0" tIns="0" rIns="0" bIns="0" rtlCol="0" anchor="ctr"/>
+          <a:lstStyle/>
+          <a:p>
+            <a:pPr indent="0" marL="0">
+              <a:buNone/>
+            </a:pPr>
+            <a:r>
+              <a:rPr lang="en-US" sz="1300" dirty="0">
+                <a:solidFill>
+                  <a:srgbClr val="1A1A1A"/>
+                </a:solidFill>
+                <a:latin typeface="Calibri" pitchFamily="34" charset="0"/>
+                <a:ea typeface="Calibri" pitchFamily="34" charset="-122"/>
+                <a:cs typeface="Calibri" pitchFamily="34" charset="-120"/>
+              </a:rPr>
+              <a:t>頭痛・吐き気などの不調は出ておらず、反応性低血糖（急降下）も起きていない</a:t>
+            </a:r>
+            <a:endParaRPr lang="en-US" sz="1300" dirty="0"/>
+          </a:p>
+        </p:txBody>
+      </p:sp>
+      <p:sp>
+        <p:nvSpPr>
+          <p:cNvPr id="16" name="Shape 14"/>
+          <p:cNvSpPr/>
+          <p:nvPr/>
+        </p:nvSpPr>
+        <p:spPr>
+          <a:xfrm>
+            <a:off x="548640" y="4297680"/>
+            <a:ext cx="109728" cy="109728"/>
+          </a:xfrm>
+          <a:prstGeom prst="oval">
+            <a:avLst/>
+          </a:prstGeom>
+          <a:solidFill>
+            <a:srgbClr val="EB6834"/>
+          </a:solidFill>
+          <a:ln/>
+        </p:spPr>
+      </p:sp>
+      <p:sp>
+        <p:nvSpPr>
+          <p:cNvPr id="17" name="Text 15"/>
+          <p:cNvSpPr txBox="1"/>
+          <p:nvPr/>
+        </p:nvSpPr>
+        <p:spPr>
+          <a:xfrm>
+            <a:off x="841248" y="4242816"/>
+            <a:ext cx="10799064" cy="457200"/>
+          </a:xfrm>
+          <a:prstGeom prst="rect">
+            <a:avLst/>
+          </a:prstGeom>
+          <a:noFill/>
+          <a:ln/>
+        </p:spPr>
+        <p:txBody>
+          <a:bodyPr wrap="square" lIns="0" tIns="0" rIns="0" bIns="0" rtlCol="0" anchor="ctr"/>
+          <a:lstStyle/>
+          <a:p>
+            <a:pPr indent="0" marL="0">
+              <a:buNone/>
+            </a:pPr>
+            <a:r>
+              <a:rPr lang="en-US" sz="1300" dirty="0">
+                <a:solidFill>
+                  <a:srgbClr val="1A1A1A"/>
+                </a:solidFill>
+                <a:latin typeface="Calibri" pitchFamily="34" charset="0"/>
+                <a:ea typeface="Calibri" pitchFamily="34" charset="-122"/>
+                <a:cs typeface="Calibri" pitchFamily="34" charset="-120"/>
+              </a:rPr>
+              <a:t>血糖の乱高下（CV・Δピーク）は固形の方が小さいが、実害（症状・クラッシュ）にはつながっていない</a:t>
+            </a:r>
+            <a:endParaRPr lang="en-US" sz="1300" dirty="0"/>
+          </a:p>
+        </p:txBody>
+      </p:sp>
+      <p:sp>
+        <p:nvSpPr>
+          <p:cNvPr id="18" name="Shape 16"/>
+          <p:cNvSpPr/>
+          <p:nvPr/>
+        </p:nvSpPr>
+        <p:spPr>
+          <a:xfrm>
+            <a:off x="548640" y="4864608"/>
+            <a:ext cx="109728" cy="109728"/>
+          </a:xfrm>
+          <a:prstGeom prst="oval">
+            <a:avLst/>
+          </a:prstGeom>
+          <a:solidFill>
+            <a:srgbClr val="EB6834"/>
+          </a:solidFill>
+          <a:ln/>
+        </p:spPr>
+      </p:sp>
+      <p:sp>
+        <p:nvSpPr>
+          <p:cNvPr id="19" name="Text 17"/>
+          <p:cNvSpPr txBox="1"/>
+          <p:nvPr/>
+        </p:nvSpPr>
+        <p:spPr>
+          <a:xfrm>
+            <a:off x="841248" y="4809744"/>
+            <a:ext cx="10799064" cy="457200"/>
+          </a:xfrm>
+          <a:prstGeom prst="rect">
+            <a:avLst/>
+          </a:prstGeom>
+          <a:noFill/>
+          <a:ln/>
+        </p:spPr>
+        <p:txBody>
+          <a:bodyPr wrap="square" lIns="0" tIns="0" rIns="0" bIns="0" rtlCol="0" anchor="ctr"/>
+          <a:lstStyle/>
+          <a:p>
+            <a:pPr indent="0" marL="0">
+              <a:buNone/>
+            </a:pPr>
+            <a:r>
+              <a:rPr lang="en-US" sz="1300" dirty="0">
+                <a:solidFill>
+                  <a:srgbClr val="1A1A1A"/>
+                </a:solidFill>
+                <a:latin typeface="Calibri" pitchFamily="34" charset="0"/>
+                <a:ea typeface="Calibri" pitchFamily="34" charset="-122"/>
+                <a:cs typeface="Calibri" pitchFamily="34" charset="-120"/>
+              </a:rPr>
+              <a:t>選手自身が語っていた「スムージー化で出力が上がった」という体感とも一致する</a:t>
+            </a:r>
+            <a:endParaRPr lang="en-US" sz="1300" dirty="0"/>
+          </a:p>
+        </p:txBody>
+      </p:sp>
+      <p:sp>
+        <p:nvSpPr>
+          <p:cNvPr id="20" name="Shape 18"/>
+          <p:cNvSpPr/>
+          <p:nvPr/>
+        </p:nvSpPr>
+        <p:spPr>
+          <a:xfrm>
+            <a:off x="548640" y="5623560"/>
+            <a:ext cx="11091672" cy="868680"/>
+          </a:xfrm>
+          <a:prstGeom prst="roundRect">
+            <a:avLst>
+              <a:gd name="adj" fmla="val 10526"/>
+            </a:avLst>
+          </a:prstGeom>
+          <a:solidFill>
+            <a:srgbClr val="FDF3E2"/>
+          </a:solidFill>
+          <a:ln w="12700">
+            <a:solidFill>
+              <a:srgbClr val="EDA100"/>
+            </a:solidFill>
+            <a:prstDash val="solid"/>
+          </a:ln>
+        </p:spPr>
+      </p:sp>
+      <p:sp>
+        <p:nvSpPr>
+          <p:cNvPr id="21" name="Text 19"/>
+          <p:cNvSpPr txBox="1"/>
+          <p:nvPr/>
+        </p:nvSpPr>
+        <p:spPr>
+          <a:xfrm>
+            <a:off x="777240" y="5742432"/>
+            <a:ext cx="10634472" cy="640080"/>
+          </a:xfrm>
+          <a:prstGeom prst="rect">
+            <a:avLst/>
+          </a:prstGeom>
+          <a:noFill/>
+          <a:ln/>
+        </p:spPr>
+        <p:txBody>
+          <a:bodyPr wrap="square" lIns="0" tIns="0" rIns="0" bIns="0" rtlCol="0" anchor="ctr"/>
+          <a:lstStyle/>
+          <a:p>
+            <a:pPr indent="0" marL="0">
+              <a:buNone/>
+            </a:pPr>
+            <a:r>
+              <a:rPr lang="en-US" sz="1250" b="1" dirty="0">
+                <a:solidFill>
+                  <a:srgbClr val="6B4B00"/>
+                </a:solidFill>
+                <a:latin typeface="Calibri" pitchFamily="34" charset="0"/>
+                <a:ea typeface="Calibri" pitchFamily="34" charset="-122"/>
+                <a:cs typeface="Calibri" pitchFamily="34" charset="-120"/>
+              </a:rPr>
+              <a:t>→ ただし最終的には「スムージー単体」よりも「おにぎりと同時に食べる」方がさらに良い結果でした（Q2で解説）。</a:t>
+            </a:r>
+            <a:endParaRPr lang="en-US" sz="1250" dirty="0"/>
+          </a:p>
+        </p:txBody>
+      </p:sp>
+    </p:spTree>
+  </p:cSld>
+  <p:clrMapOvr>
+    <a:masterClrMapping/>
+  </p:clrMapOvr>
+</p:sld>
+</file>
+
+<file path=ppt/slides/slide5.xml><?xml version="1.0" encoding="utf-8"?>
+<p:sld xmlns:a="http://schemas.openxmlformats.org/drawingml/2006/main" xmlns:r="http://schemas.openxmlformats.org/officeDocument/2006/relationships" xmlns:p="http://schemas.openxmlformats.org/presentationml/2006/main">
+  <p:cSld name="Slide 5">
+    <p:bg>
+      <p:bgPr>
+        <a:solidFill>
+          <a:srgbClr val="FFFFFF"/>
+        </a:solidFill>
+      </p:bgPr>
+    </p:bg>
+    <p:spTree>
+      <p:nvGrpSpPr>
+        <p:cNvPr id="1" name=""/>
+        <p:cNvGrpSpPr/>
+        <p:nvPr/>
+      </p:nvGrpSpPr>
+      <p:grpSpPr>
+        <a:xfrm>
+          <a:off x="0" y="0"/>
+          <a:ext cx="0" cy="0"/>
+          <a:chOff x="0" y="0"/>
+          <a:chExt cx="0" cy="0"/>
+        </a:xfrm>
+      </p:grpSpPr>
+      <p:sp>
+        <p:nvSpPr>
+          <p:cNvPr id="2" name="Text 0"/>
+          <p:cNvSpPr txBox="1"/>
+          <p:nvPr/>
+        </p:nvSpPr>
+        <p:spPr>
+          <a:xfrm>
+            <a:off x="548640" y="384048"/>
+            <a:ext cx="11091672" cy="310896"/>
+          </a:xfrm>
+          <a:prstGeom prst="rect">
+            <a:avLst/>
+          </a:prstGeom>
+          <a:noFill/>
+          <a:ln/>
+        </p:spPr>
+        <p:txBody>
+          <a:bodyPr wrap="square" rtlCol="0" anchor="ctr"/>
+          <a:lstStyle/>
+          <a:p>
+            <a:pPr indent="0" marL="0">
+              <a:buNone/>
+            </a:pPr>
+            <a:r>
+              <a:rPr lang="en-US" sz="1250" b="1" spc="100" kern="0" dirty="0">
+                <a:solidFill>
+                  <a:srgbClr val="1C7293"/>
+                </a:solidFill>
+                <a:latin typeface="Calibri" pitchFamily="34" charset="0"/>
+                <a:ea typeface="Calibri" pitchFamily="34" charset="-122"/>
+                <a:cs typeface="Calibri" pitchFamily="34" charset="-120"/>
+              </a:rPr>
               <a:t>Q2 – RESULTS</a:t>
             </a:r>
             <a:endParaRPr lang="en-US" sz="1250" dirty="0"/>
@@ -4356,7 +5297,7 @@
       </p:sp>
       <p:graphicFrame>
         <p:nvGraphicFramePr>
-          <p:cNvPr id="5" name="Table 0"/>
+          <p:cNvPr id="6" name="Table 0"/>
           <p:cNvGraphicFramePr>
             <a:graphicFrameLocks noGrp="1"/>
           </p:cNvGraphicFramePr>
@@ -6205,623 +7146,6 @@
 </p:sld>
 </file>
 
-<file path=ppt/slides/slide5.xml><?xml version="1.0" encoding="utf-8"?>
-<p:sld xmlns:a="http://schemas.openxmlformats.org/drawingml/2006/main" xmlns:r="http://schemas.openxmlformats.org/officeDocument/2006/relationships" xmlns:p="http://schemas.openxmlformats.org/presentationml/2006/main">
-  <p:cSld name="Slide 5">
-    <p:bg>
-      <p:bgPr>
-        <a:solidFill>
-          <a:srgbClr val="FFFFFF"/>
-        </a:solidFill>
-      </p:bgPr>
-    </p:bg>
-    <p:spTree>
-      <p:nvGrpSpPr>
-        <p:cNvPr id="1" name=""/>
-        <p:cNvGrpSpPr/>
-        <p:nvPr/>
-      </p:nvGrpSpPr>
-      <p:grpSpPr>
-        <a:xfrm>
-          <a:off x="0" y="0"/>
-          <a:ext cx="0" cy="0"/>
-          <a:chOff x="0" y="0"/>
-          <a:chExt cx="0" cy="0"/>
-        </a:xfrm>
-      </p:grpSpPr>
-      <p:sp>
-        <p:nvSpPr>
-          <p:cNvPr id="2" name="Text 0"/>
-          <p:cNvSpPr txBox="1"/>
-          <p:nvPr/>
-        </p:nvSpPr>
-        <p:spPr>
-          <a:xfrm>
-            <a:off x="548640" y="384048"/>
-            <a:ext cx="11091672" cy="310896"/>
-          </a:xfrm>
-          <a:prstGeom prst="rect">
-            <a:avLst/>
-          </a:prstGeom>
-          <a:noFill/>
-          <a:ln/>
-        </p:spPr>
-        <p:txBody>
-          <a:bodyPr wrap="square" rtlCol="0" anchor="ctr"/>
-          <a:lstStyle/>
-          <a:p>
-            <a:pPr indent="0" marL="0">
-              <a:buNone/>
-            </a:pPr>
-            <a:r>
-              <a:rPr lang="en-US" sz="1250" b="1" spc="100" kern="0" dirty="0">
-                <a:solidFill>
-                  <a:srgbClr val="1C7293"/>
-                </a:solidFill>
-                <a:latin typeface="Calibri" pitchFamily="34" charset="0"/>
-                <a:ea typeface="Calibri" pitchFamily="34" charset="-122"/>
-                <a:cs typeface="Calibri" pitchFamily="34" charset="-120"/>
-              </a:rPr>
-              <a:t>Q2 – DISCUSSION</a:t>
-            </a:r>
-            <a:endParaRPr lang="en-US" sz="1250" dirty="0"/>
-          </a:p>
-        </p:txBody>
-      </p:sp>
-      <p:sp>
-        <p:nvSpPr>
-          <p:cNvPr id="3" name="Text 1"/>
-          <p:cNvSpPr txBox="1"/>
-          <p:nvPr/>
-        </p:nvSpPr>
-        <p:spPr>
-          <a:xfrm>
-            <a:off x="548640" y="676656"/>
-            <a:ext cx="11091672" cy="594360"/>
-          </a:xfrm>
-          <a:prstGeom prst="rect">
-            <a:avLst/>
-          </a:prstGeom>
-          <a:noFill/>
-          <a:ln/>
-        </p:spPr>
-        <p:txBody>
-          <a:bodyPr wrap="square" rtlCol="0" anchor="ctr"/>
-          <a:lstStyle/>
-          <a:p>
-            <a:pPr indent="0" marL="0">
-              <a:buNone/>
-            </a:pPr>
-            <a:r>
-              <a:rPr lang="en-US" sz="2600" b="1" dirty="0">
-                <a:solidFill>
-                  <a:srgbClr val="21295C"/>
-                </a:solidFill>
-                <a:latin typeface="Cambria" pitchFamily="34" charset="0"/>
-                <a:ea typeface="Cambria" pitchFamily="34" charset="-122"/>
-                <a:cs typeface="Cambria" pitchFamily="34" charset="-120"/>
-              </a:rPr>
-              <a:t>食べるタイミング：考察と結論</a:t>
-            </a:r>
-            <a:endParaRPr lang="en-US" sz="2600" dirty="0"/>
-          </a:p>
-        </p:txBody>
-      </p:sp>
-      <p:sp>
-        <p:nvSpPr>
-          <p:cNvPr id="4" name="Shape 2"/>
-          <p:cNvSpPr/>
-          <p:nvPr/>
-        </p:nvSpPr>
-        <p:spPr>
-          <a:xfrm>
-            <a:off x="548640" y="1298448"/>
-            <a:ext cx="11091672" cy="384048"/>
-          </a:xfrm>
-          <a:prstGeom prst="roundRect">
-            <a:avLst>
-              <a:gd name="adj" fmla="val 19048"/>
-            </a:avLst>
-          </a:prstGeom>
-          <a:solidFill>
-            <a:srgbClr val="F4F7F9"/>
-          </a:solidFill>
-          <a:ln/>
-        </p:spPr>
-      </p:sp>
-      <p:sp>
-        <p:nvSpPr>
-          <p:cNvPr id="5" name="Text 3"/>
-          <p:cNvSpPr txBox="1"/>
-          <p:nvPr/>
-        </p:nvSpPr>
-        <p:spPr>
-          <a:xfrm>
-            <a:off x="685800" y="1298448"/>
-            <a:ext cx="548640" cy="384048"/>
-          </a:xfrm>
-          <a:prstGeom prst="rect">
-            <a:avLst/>
-          </a:prstGeom>
-          <a:noFill/>
-          <a:ln/>
-        </p:spPr>
-        <p:txBody>
-          <a:bodyPr wrap="square" lIns="0" tIns="0" rIns="0" bIns="0" rtlCol="0" anchor="ctr"/>
-          <a:lstStyle/>
-          <a:p>
-            <a:pPr algn="ctr" indent="0" marL="0">
-              <a:buNone/>
-            </a:pPr>
-            <a:r>
-              <a:rPr lang="en-US" sz="1400" b="1" dirty="0">
-                <a:solidFill>
-                  <a:srgbClr val="1C7293"/>
-                </a:solidFill>
-                <a:latin typeface="Cambria" pitchFamily="34" charset="0"/>
-                <a:ea typeface="Cambria" pitchFamily="34" charset="-122"/>
-                <a:cs typeface="Cambria" pitchFamily="34" charset="-120"/>
-              </a:rPr>
-              <a:t>Q2</a:t>
-            </a:r>
-            <a:endParaRPr lang="en-US" sz="1400" dirty="0"/>
-          </a:p>
-        </p:txBody>
-      </p:sp>
-      <p:sp>
-        <p:nvSpPr>
-          <p:cNvPr id="6" name="Text 4"/>
-          <p:cNvSpPr txBox="1"/>
-          <p:nvPr/>
-        </p:nvSpPr>
-        <p:spPr>
-          <a:xfrm>
-            <a:off x="1280160" y="1298448"/>
-            <a:ext cx="10177272" cy="384048"/>
-          </a:xfrm>
-          <a:prstGeom prst="rect">
-            <a:avLst/>
-          </a:prstGeom>
-          <a:noFill/>
-          <a:ln/>
-        </p:spPr>
-        <p:txBody>
-          <a:bodyPr wrap="square" lIns="0" tIns="0" rIns="0" bIns="0" rtlCol="0" anchor="ctr"/>
-          <a:lstStyle/>
-          <a:p>
-            <a:pPr indent="0" marL="0">
-              <a:buNone/>
-            </a:pPr>
-            <a:r>
-              <a:rPr lang="en-US" sz="1300" dirty="0">
-                <a:solidFill>
-                  <a:srgbClr val="21295C"/>
-                </a:solidFill>
-                <a:latin typeface="Calibri" pitchFamily="34" charset="0"/>
-                <a:ea typeface="Calibri" pitchFamily="34" charset="-122"/>
-                <a:cs typeface="Calibri" pitchFamily="34" charset="-120"/>
-              </a:rPr>
-              <a:t>スムージーとおにぎりを食べるタイミングはいつが良いのか？</a:t>
-            </a:r>
-            <a:endParaRPr lang="en-US" sz="1300" dirty="0"/>
-          </a:p>
-        </p:txBody>
-      </p:sp>
-      <p:sp>
-        <p:nvSpPr>
-          <p:cNvPr id="7" name="Shape 5"/>
-          <p:cNvSpPr/>
-          <p:nvPr/>
-        </p:nvSpPr>
-        <p:spPr>
-          <a:xfrm>
-            <a:off x="548640" y="1874520"/>
-            <a:ext cx="11091672" cy="1051560"/>
-          </a:xfrm>
-          <a:prstGeom prst="roundRect">
-            <a:avLst>
-              <a:gd name="adj" fmla="val 10435"/>
-            </a:avLst>
-          </a:prstGeom>
-          <a:solidFill>
-            <a:srgbClr val="EAF7F0"/>
-          </a:solidFill>
-          <a:ln w="15875">
-            <a:solidFill>
-              <a:srgbClr val="1BAF7A"/>
-            </a:solidFill>
-            <a:prstDash val="solid"/>
-          </a:ln>
-        </p:spPr>
-      </p:sp>
-      <p:sp>
-        <p:nvSpPr>
-          <p:cNvPr id="8" name="Text 6"/>
-          <p:cNvSpPr txBox="1"/>
-          <p:nvPr/>
-        </p:nvSpPr>
-        <p:spPr>
-          <a:xfrm>
-            <a:off x="822960" y="1984248"/>
-            <a:ext cx="1828800" cy="274320"/>
-          </a:xfrm>
-          <a:prstGeom prst="rect">
-            <a:avLst/>
-          </a:prstGeom>
-          <a:noFill/>
-          <a:ln/>
-        </p:spPr>
-        <p:txBody>
-          <a:bodyPr wrap="square" lIns="0" tIns="0" rIns="0" bIns="0" rtlCol="0" anchor="ctr"/>
-          <a:lstStyle/>
-          <a:p>
-            <a:pPr indent="0" marL="0">
-              <a:buNone/>
-            </a:pPr>
-            <a:r>
-              <a:rPr lang="en-US" sz="1200" b="1" dirty="0">
-                <a:solidFill>
-                  <a:srgbClr val="0F5C3D"/>
-                </a:solidFill>
-                <a:latin typeface="Calibri" pitchFamily="34" charset="0"/>
-                <a:ea typeface="Calibri" pitchFamily="34" charset="-122"/>
-                <a:cs typeface="Calibri" pitchFamily="34" charset="-120"/>
-              </a:rPr>
-              <a:t>✓ 答え</a:t>
-            </a:r>
-            <a:endParaRPr lang="en-US" sz="1200" dirty="0"/>
-          </a:p>
-        </p:txBody>
-      </p:sp>
-      <p:sp>
-        <p:nvSpPr>
-          <p:cNvPr id="9" name="Text 7"/>
-          <p:cNvSpPr txBox="1"/>
-          <p:nvPr/>
-        </p:nvSpPr>
-        <p:spPr>
-          <a:xfrm>
-            <a:off x="822960" y="2258568"/>
-            <a:ext cx="10543032" cy="548640"/>
-          </a:xfrm>
-          <a:prstGeom prst="rect">
-            <a:avLst/>
-          </a:prstGeom>
-          <a:noFill/>
-          <a:ln/>
-        </p:spPr>
-        <p:txBody>
-          <a:bodyPr wrap="square" lIns="0" tIns="0" rIns="0" bIns="0" rtlCol="0" anchor="ctr"/>
-          <a:lstStyle/>
-          <a:p>
-            <a:pPr indent="0" marL="0">
-              <a:buNone/>
-            </a:pPr>
-            <a:r>
-              <a:rPr lang="en-US" sz="2000" b="1" dirty="0">
-                <a:solidFill>
-                  <a:srgbClr val="0F5C3D"/>
-                </a:solidFill>
-                <a:latin typeface="Cambria" pitchFamily="34" charset="0"/>
-                <a:ea typeface="Cambria" pitchFamily="34" charset="-122"/>
-                <a:cs typeface="Cambria" pitchFamily="34" charset="-120"/>
-              </a:rPr>
-              <a:t>8:00に「同時に」食べるのが良い</a:t>
-            </a:r>
-            <a:endParaRPr lang="en-US" sz="2000" dirty="0"/>
-          </a:p>
-        </p:txBody>
-      </p:sp>
-      <p:sp>
-        <p:nvSpPr>
-          <p:cNvPr id="10" name="Shape 8"/>
-          <p:cNvSpPr/>
-          <p:nvPr/>
-        </p:nvSpPr>
-        <p:spPr>
-          <a:xfrm>
-            <a:off x="548640" y="3163824"/>
-            <a:ext cx="109728" cy="109728"/>
-          </a:xfrm>
-          <a:prstGeom prst="oval">
-            <a:avLst/>
-          </a:prstGeom>
-          <a:solidFill>
-            <a:srgbClr val="1BAF7A"/>
-          </a:solidFill>
-          <a:ln/>
-        </p:spPr>
-      </p:sp>
-      <p:sp>
-        <p:nvSpPr>
-          <p:cNvPr id="11" name="Text 9"/>
-          <p:cNvSpPr txBox="1"/>
-          <p:nvPr/>
-        </p:nvSpPr>
-        <p:spPr>
-          <a:xfrm>
-            <a:off x="841248" y="3108960"/>
-            <a:ext cx="10799064" cy="457200"/>
-          </a:xfrm>
-          <a:prstGeom prst="rect">
-            <a:avLst/>
-          </a:prstGeom>
-          <a:noFill/>
-          <a:ln/>
-        </p:spPr>
-        <p:txBody>
-          <a:bodyPr wrap="square" lIns="0" tIns="0" rIns="0" bIns="0" rtlCol="0" anchor="ctr"/>
-          <a:lstStyle/>
-          <a:p>
-            <a:pPr indent="0" marL="0">
-              <a:buNone/>
-            </a:pPr>
-            <a:r>
-              <a:rPr lang="en-US" sz="1300" dirty="0">
-                <a:solidFill>
-                  <a:srgbClr val="1A1A1A"/>
-                </a:solidFill>
-                <a:latin typeface="Calibri" pitchFamily="34" charset="0"/>
-                <a:ea typeface="Calibri" pitchFamily="34" charset="-122"/>
-                <a:cs typeface="Calibri" pitchFamily="34" charset="-120"/>
-              </a:rPr>
-              <a:t>同時摂取は、練習中の燃料供給をスムージー単独と同水準（220 vs 222 mg/dL）に保ったまま、血糖の乱高下（CV・Δピーク）を明確に小さくする</a:t>
-            </a:r>
-            <a:endParaRPr lang="en-US" sz="1300" dirty="0"/>
-          </a:p>
-        </p:txBody>
-      </p:sp>
-      <p:sp>
-        <p:nvSpPr>
-          <p:cNvPr id="12" name="Shape 10"/>
-          <p:cNvSpPr/>
-          <p:nvPr/>
-        </p:nvSpPr>
-        <p:spPr>
-          <a:xfrm>
-            <a:off x="548640" y="3730752"/>
-            <a:ext cx="109728" cy="109728"/>
-          </a:xfrm>
-          <a:prstGeom prst="oval">
-            <a:avLst/>
-          </a:prstGeom>
-          <a:solidFill>
-            <a:srgbClr val="1BAF7A"/>
-          </a:solidFill>
-          <a:ln/>
-        </p:spPr>
-      </p:sp>
-      <p:sp>
-        <p:nvSpPr>
-          <p:cNvPr id="13" name="Text 11"/>
-          <p:cNvSpPr txBox="1"/>
-          <p:nvPr/>
-        </p:nvSpPr>
-        <p:spPr>
-          <a:xfrm>
-            <a:off x="841248" y="3675888"/>
-            <a:ext cx="10799064" cy="457200"/>
-          </a:xfrm>
-          <a:prstGeom prst="rect">
-            <a:avLst/>
-          </a:prstGeom>
-          <a:noFill/>
-          <a:ln/>
-        </p:spPr>
-        <p:txBody>
-          <a:bodyPr wrap="square" lIns="0" tIns="0" rIns="0" bIns="0" rtlCol="0" anchor="ctr"/>
-          <a:lstStyle/>
-          <a:p>
-            <a:pPr indent="0" marL="0">
-              <a:buNone/>
-            </a:pPr>
-            <a:r>
-              <a:rPr lang="en-US" sz="1300" dirty="0">
-                <a:solidFill>
-                  <a:srgbClr val="1A1A1A"/>
-                </a:solidFill>
-                <a:latin typeface="Calibri" pitchFamily="34" charset="0"/>
-                <a:ea typeface="Calibri" pitchFamily="34" charset="-122"/>
-                <a:cs typeface="Calibri" pitchFamily="34" charset="-120"/>
-              </a:rPr>
-              <a:t>おにぎり（ゆっくり吸収されるデンプン）が副食の急な糖吸収を緩衝し、波形がなだらかになると解釈できる</a:t>
-            </a:r>
-            <a:endParaRPr lang="en-US" sz="1300" dirty="0"/>
-          </a:p>
-        </p:txBody>
-      </p:sp>
-      <p:sp>
-        <p:nvSpPr>
-          <p:cNvPr id="14" name="Shape 12"/>
-          <p:cNvSpPr/>
-          <p:nvPr/>
-        </p:nvSpPr>
-        <p:spPr>
-          <a:xfrm>
-            <a:off x="548640" y="4297680"/>
-            <a:ext cx="109728" cy="109728"/>
-          </a:xfrm>
-          <a:prstGeom prst="oval">
-            <a:avLst/>
-          </a:prstGeom>
-          <a:solidFill>
-            <a:srgbClr val="1BAF7A"/>
-          </a:solidFill>
-          <a:ln/>
-        </p:spPr>
-      </p:sp>
-      <p:sp>
-        <p:nvSpPr>
-          <p:cNvPr id="15" name="Text 13"/>
-          <p:cNvSpPr txBox="1"/>
-          <p:nvPr/>
-        </p:nvSpPr>
-        <p:spPr>
-          <a:xfrm>
-            <a:off x="841248" y="4242816"/>
-            <a:ext cx="10799064" cy="457200"/>
-          </a:xfrm>
-          <a:prstGeom prst="rect">
-            <a:avLst/>
-          </a:prstGeom>
-          <a:noFill/>
-          <a:ln/>
-        </p:spPr>
-        <p:txBody>
-          <a:bodyPr wrap="square" lIns="0" tIns="0" rIns="0" bIns="0" rtlCol="0" anchor="ctr"/>
-          <a:lstStyle/>
-          <a:p>
-            <a:pPr indent="0" marL="0">
-              <a:buNone/>
-            </a:pPr>
-            <a:r>
-              <a:rPr lang="en-US" sz="1300" dirty="0">
-                <a:solidFill>
-                  <a:srgbClr val="1A1A1A"/>
-                </a:solidFill>
-                <a:latin typeface="Calibri" pitchFamily="34" charset="0"/>
-                <a:ea typeface="Calibri" pitchFamily="34" charset="-122"/>
-                <a:cs typeface="Calibri" pitchFamily="34" charset="-120"/>
-              </a:rPr>
-              <a:t>満腹感は上がるが、頭痛・吐き気などの消化器症状は軽微で、実害は見られない</a:t>
-            </a:r>
-            <a:endParaRPr lang="en-US" sz="1300" dirty="0"/>
-          </a:p>
-        </p:txBody>
-      </p:sp>
-      <p:sp>
-        <p:nvSpPr>
-          <p:cNvPr id="16" name="Shape 14"/>
-          <p:cNvSpPr/>
-          <p:nvPr/>
-        </p:nvSpPr>
-        <p:spPr>
-          <a:xfrm>
-            <a:off x="548640" y="4864608"/>
-            <a:ext cx="109728" cy="109728"/>
-          </a:xfrm>
-          <a:prstGeom prst="oval">
-            <a:avLst/>
-          </a:prstGeom>
-          <a:solidFill>
-            <a:srgbClr val="1BAF7A"/>
-          </a:solidFill>
-          <a:ln/>
-        </p:spPr>
-      </p:sp>
-      <p:sp>
-        <p:nvSpPr>
-          <p:cNvPr id="17" name="Text 15"/>
-          <p:cNvSpPr txBox="1"/>
-          <p:nvPr/>
-        </p:nvSpPr>
-        <p:spPr>
-          <a:xfrm>
-            <a:off x="841248" y="4809744"/>
-            <a:ext cx="10799064" cy="457200"/>
-          </a:xfrm>
-          <a:prstGeom prst="rect">
-            <a:avLst/>
-          </a:prstGeom>
-          <a:noFill/>
-          <a:ln/>
-        </p:spPr>
-        <p:txBody>
-          <a:bodyPr wrap="square" lIns="0" tIns="0" rIns="0" bIns="0" rtlCol="0" anchor="ctr"/>
-          <a:lstStyle/>
-          <a:p>
-            <a:pPr indent="0" marL="0">
-              <a:buNone/>
-            </a:pPr>
-            <a:r>
-              <a:rPr lang="en-US" sz="1300" dirty="0">
-                <a:solidFill>
-                  <a:srgbClr val="1A1A1A"/>
-                </a:solidFill>
-                <a:latin typeface="Calibri" pitchFamily="34" charset="0"/>
-                <a:ea typeface="Calibri" pitchFamily="34" charset="-122"/>
-                <a:cs typeface="Calibri" pitchFamily="34" charset="-120"/>
-              </a:rPr>
-              <a:t>夜間コンディション（起床時・睡眠）もスムージー単独よりわずかに良好な傾向</a:t>
-            </a:r>
-            <a:endParaRPr lang="en-US" sz="1300" dirty="0"/>
-          </a:p>
-        </p:txBody>
-      </p:sp>
-      <p:sp>
-        <p:nvSpPr>
-          <p:cNvPr id="18" name="Shape 16"/>
-          <p:cNvSpPr/>
-          <p:nvPr/>
-        </p:nvSpPr>
-        <p:spPr>
-          <a:xfrm>
-            <a:off x="548640" y="5623560"/>
-            <a:ext cx="11091672" cy="868680"/>
-          </a:xfrm>
-          <a:prstGeom prst="roundRect">
-            <a:avLst>
-              <a:gd name="adj" fmla="val 10526"/>
-            </a:avLst>
-          </a:prstGeom>
-          <a:solidFill>
-            <a:srgbClr val="FDF3E2"/>
-          </a:solidFill>
-          <a:ln w="12700">
-            <a:solidFill>
-              <a:srgbClr val="EDA100"/>
-            </a:solidFill>
-            <a:prstDash val="solid"/>
-          </a:ln>
-        </p:spPr>
-      </p:sp>
-      <p:sp>
-        <p:nvSpPr>
-          <p:cNvPr id="19" name="Text 17"/>
-          <p:cNvSpPr txBox="1"/>
-          <p:nvPr/>
-        </p:nvSpPr>
-        <p:spPr>
-          <a:xfrm>
-            <a:off x="777240" y="5742432"/>
-            <a:ext cx="10634472" cy="640080"/>
-          </a:xfrm>
-          <a:prstGeom prst="rect">
-            <a:avLst/>
-          </a:prstGeom>
-          <a:noFill/>
-          <a:ln/>
-        </p:spPr>
-        <p:txBody>
-          <a:bodyPr wrap="square" lIns="0" tIns="0" rIns="0" bIns="0" rtlCol="0" anchor="ctr"/>
-          <a:lstStyle/>
-          <a:p>
-            <a:pPr indent="0" marL="0">
-              <a:buNone/>
-            </a:pPr>
-            <a:r>
-              <a:rPr lang="en-US" sz="1250" b="1" dirty="0">
-                <a:solidFill>
-                  <a:srgbClr val="6B4B00"/>
-                </a:solidFill>
-                <a:latin typeface="Calibri" pitchFamily="34" charset="0"/>
-                <a:ea typeface="Calibri" pitchFamily="34" charset="-122"/>
-                <a:cs typeface="Calibri" pitchFamily="34" charset="-120"/>
-              </a:rPr>
-              <a:t>→ 「おにぎりを崩さず、副食だけをスムージー化して同時に食べる」という部分的液状化のアイデアは、血糖の観点から明確に支持される。</a:t>
-            </a:r>
-            <a:endParaRPr lang="en-US" sz="1250" dirty="0"/>
-          </a:p>
-        </p:txBody>
-      </p:sp>
-    </p:spTree>
-  </p:cSld>
-  <p:clrMapOvr>
-    <a:masterClrMapping/>
-  </p:clrMapOvr>
-</p:sld>
-</file>
-
 <file path=ppt/slides/slide6.xml><?xml version="1.0" encoding="utf-8"?>
 <p:sld xmlns:a="http://schemas.openxmlformats.org/drawingml/2006/main" xmlns:r="http://schemas.openxmlformats.org/officeDocument/2006/relationships" xmlns:p="http://schemas.openxmlformats.org/presentationml/2006/main">
   <p:cSld name="Slide 6">
@@ -6879,6 +7203,689 @@
                 <a:ea typeface="Calibri" pitchFamily="34" charset="-122"/>
                 <a:cs typeface="Calibri" pitchFamily="34" charset="-120"/>
               </a:rPr>
+              <a:t>Q2 – DISCUSSION</a:t>
+            </a:r>
+            <a:endParaRPr lang="en-US" sz="1250" dirty="0"/>
+          </a:p>
+        </p:txBody>
+      </p:sp>
+      <p:sp>
+        <p:nvSpPr>
+          <p:cNvPr id="3" name="Text 1"/>
+          <p:cNvSpPr txBox="1"/>
+          <p:nvPr/>
+        </p:nvSpPr>
+        <p:spPr>
+          <a:xfrm>
+            <a:off x="548640" y="676656"/>
+            <a:ext cx="11091672" cy="594360"/>
+          </a:xfrm>
+          <a:prstGeom prst="rect">
+            <a:avLst/>
+          </a:prstGeom>
+          <a:noFill/>
+          <a:ln/>
+        </p:spPr>
+        <p:txBody>
+          <a:bodyPr wrap="square" rtlCol="0" anchor="ctr"/>
+          <a:lstStyle/>
+          <a:p>
+            <a:pPr indent="0" marL="0">
+              <a:buNone/>
+            </a:pPr>
+            <a:r>
+              <a:rPr lang="en-US" sz="2600" b="1" dirty="0">
+                <a:solidFill>
+                  <a:srgbClr val="21295C"/>
+                </a:solidFill>
+                <a:latin typeface="Cambria" pitchFamily="34" charset="0"/>
+                <a:ea typeface="Cambria" pitchFamily="34" charset="-122"/>
+                <a:cs typeface="Cambria" pitchFamily="34" charset="-120"/>
+              </a:rPr>
+              <a:t>食べるタイミング：考察と結論</a:t>
+            </a:r>
+            <a:endParaRPr lang="en-US" sz="2600" dirty="0"/>
+          </a:p>
+        </p:txBody>
+      </p:sp>
+      <p:sp>
+        <p:nvSpPr>
+          <p:cNvPr id="4" name="Shape 2"/>
+          <p:cNvSpPr/>
+          <p:nvPr/>
+        </p:nvSpPr>
+        <p:spPr>
+          <a:xfrm>
+            <a:off x="548640" y="1298448"/>
+            <a:ext cx="11091672" cy="384048"/>
+          </a:xfrm>
+          <a:prstGeom prst="roundRect">
+            <a:avLst>
+              <a:gd name="adj" fmla="val 19048"/>
+            </a:avLst>
+          </a:prstGeom>
+          <a:solidFill>
+            <a:srgbClr val="F4F7F9"/>
+          </a:solidFill>
+          <a:ln/>
+        </p:spPr>
+      </p:sp>
+      <p:sp>
+        <p:nvSpPr>
+          <p:cNvPr id="5" name="Text 3"/>
+          <p:cNvSpPr txBox="1"/>
+          <p:nvPr/>
+        </p:nvSpPr>
+        <p:spPr>
+          <a:xfrm>
+            <a:off x="685800" y="1298448"/>
+            <a:ext cx="548640" cy="384048"/>
+          </a:xfrm>
+          <a:prstGeom prst="rect">
+            <a:avLst/>
+          </a:prstGeom>
+          <a:noFill/>
+          <a:ln/>
+        </p:spPr>
+        <p:txBody>
+          <a:bodyPr wrap="square" lIns="0" tIns="0" rIns="0" bIns="0" rtlCol="0" anchor="ctr"/>
+          <a:lstStyle/>
+          <a:p>
+            <a:pPr algn="ctr" indent="0" marL="0">
+              <a:buNone/>
+            </a:pPr>
+            <a:r>
+              <a:rPr lang="en-US" sz="1400" b="1" dirty="0">
+                <a:solidFill>
+                  <a:srgbClr val="1C7293"/>
+                </a:solidFill>
+                <a:latin typeface="Cambria" pitchFamily="34" charset="0"/>
+                <a:ea typeface="Cambria" pitchFamily="34" charset="-122"/>
+                <a:cs typeface="Cambria" pitchFamily="34" charset="-120"/>
+              </a:rPr>
+              <a:t>Q2</a:t>
+            </a:r>
+            <a:endParaRPr lang="en-US" sz="1400" dirty="0"/>
+          </a:p>
+        </p:txBody>
+      </p:sp>
+      <p:sp>
+        <p:nvSpPr>
+          <p:cNvPr id="6" name="Text 4"/>
+          <p:cNvSpPr txBox="1"/>
+          <p:nvPr/>
+        </p:nvSpPr>
+        <p:spPr>
+          <a:xfrm>
+            <a:off x="1280160" y="1298448"/>
+            <a:ext cx="10177272" cy="384048"/>
+          </a:xfrm>
+          <a:prstGeom prst="rect">
+            <a:avLst/>
+          </a:prstGeom>
+          <a:noFill/>
+          <a:ln/>
+        </p:spPr>
+        <p:txBody>
+          <a:bodyPr wrap="square" lIns="0" tIns="0" rIns="0" bIns="0" rtlCol="0" anchor="ctr"/>
+          <a:lstStyle/>
+          <a:p>
+            <a:pPr indent="0" marL="0">
+              <a:buNone/>
+            </a:pPr>
+            <a:r>
+              <a:rPr lang="en-US" sz="1300" dirty="0">
+                <a:solidFill>
+                  <a:srgbClr val="21295C"/>
+                </a:solidFill>
+                <a:latin typeface="Calibri" pitchFamily="34" charset="0"/>
+                <a:ea typeface="Calibri" pitchFamily="34" charset="-122"/>
+                <a:cs typeface="Calibri" pitchFamily="34" charset="-120"/>
+              </a:rPr>
+              <a:t>スムージーとおにぎりを食べるタイミングはいつが良いのか？</a:t>
+            </a:r>
+            <a:endParaRPr lang="en-US" sz="1300" dirty="0"/>
+          </a:p>
+        </p:txBody>
+      </p:sp>
+      <p:sp>
+        <p:nvSpPr>
+          <p:cNvPr id="7" name="Shape 5"/>
+          <p:cNvSpPr/>
+          <p:nvPr/>
+        </p:nvSpPr>
+        <p:spPr>
+          <a:xfrm>
+            <a:off x="548640" y="1874520"/>
+            <a:ext cx="11091672" cy="1051560"/>
+          </a:xfrm>
+          <a:prstGeom prst="roundRect">
+            <a:avLst>
+              <a:gd name="adj" fmla="val 10435"/>
+            </a:avLst>
+          </a:prstGeom>
+          <a:solidFill>
+            <a:srgbClr val="EAF7F0"/>
+          </a:solidFill>
+          <a:ln w="15875">
+            <a:solidFill>
+              <a:srgbClr val="1BAF7A"/>
+            </a:solidFill>
+            <a:prstDash val="solid"/>
+          </a:ln>
+        </p:spPr>
+      </p:sp>
+      <p:sp>
+        <p:nvSpPr>
+          <p:cNvPr id="8" name="Text 6"/>
+          <p:cNvSpPr txBox="1"/>
+          <p:nvPr/>
+        </p:nvSpPr>
+        <p:spPr>
+          <a:xfrm>
+            <a:off x="822960" y="1984248"/>
+            <a:ext cx="1828800" cy="274320"/>
+          </a:xfrm>
+          <a:prstGeom prst="rect">
+            <a:avLst/>
+          </a:prstGeom>
+          <a:noFill/>
+          <a:ln/>
+        </p:spPr>
+        <p:txBody>
+          <a:bodyPr wrap="square" lIns="0" tIns="0" rIns="0" bIns="0" rtlCol="0" anchor="ctr"/>
+          <a:lstStyle/>
+          <a:p>
+            <a:pPr indent="0" marL="0">
+              <a:buNone/>
+            </a:pPr>
+            <a:r>
+              <a:rPr lang="en-US" sz="1200" b="1" dirty="0">
+                <a:solidFill>
+                  <a:srgbClr val="0F5C3D"/>
+                </a:solidFill>
+                <a:latin typeface="Calibri" pitchFamily="34" charset="0"/>
+                <a:ea typeface="Calibri" pitchFamily="34" charset="-122"/>
+                <a:cs typeface="Calibri" pitchFamily="34" charset="-120"/>
+              </a:rPr>
+              <a:t>✓ 答え</a:t>
+            </a:r>
+            <a:endParaRPr lang="en-US" sz="1200" dirty="0"/>
+          </a:p>
+        </p:txBody>
+      </p:sp>
+      <p:sp>
+        <p:nvSpPr>
+          <p:cNvPr id="9" name="Text 7"/>
+          <p:cNvSpPr txBox="1"/>
+          <p:nvPr/>
+        </p:nvSpPr>
+        <p:spPr>
+          <a:xfrm>
+            <a:off x="822960" y="2258568"/>
+            <a:ext cx="10543032" cy="548640"/>
+          </a:xfrm>
+          <a:prstGeom prst="rect">
+            <a:avLst/>
+          </a:prstGeom>
+          <a:noFill/>
+          <a:ln/>
+        </p:spPr>
+        <p:txBody>
+          <a:bodyPr wrap="square" lIns="0" tIns="0" rIns="0" bIns="0" rtlCol="0" anchor="ctr"/>
+          <a:lstStyle/>
+          <a:p>
+            <a:pPr indent="0" marL="0">
+              <a:buNone/>
+            </a:pPr>
+            <a:r>
+              <a:rPr lang="en-US" sz="2000" b="1" dirty="0">
+                <a:solidFill>
+                  <a:srgbClr val="0F5C3D"/>
+                </a:solidFill>
+                <a:latin typeface="Cambria" pitchFamily="34" charset="0"/>
+                <a:ea typeface="Cambria" pitchFamily="34" charset="-122"/>
+                <a:cs typeface="Cambria" pitchFamily="34" charset="-120"/>
+              </a:rPr>
+              <a:t>8:00に「同時に」食べるのが良い</a:t>
+            </a:r>
+            <a:endParaRPr lang="en-US" sz="2000" dirty="0"/>
+          </a:p>
+        </p:txBody>
+      </p:sp>
+      <p:sp>
+        <p:nvSpPr>
+          <p:cNvPr id="10" name="Shape 8"/>
+          <p:cNvSpPr/>
+          <p:nvPr/>
+        </p:nvSpPr>
+        <p:spPr>
+          <a:xfrm>
+            <a:off x="7708392" y="1984248"/>
+            <a:ext cx="3931920" cy="310896"/>
+          </a:xfrm>
+          <a:prstGeom prst="roundRect">
+            <a:avLst>
+              <a:gd name="adj" fmla="val 20588"/>
+            </a:avLst>
+          </a:prstGeom>
+          <a:solidFill>
+            <a:srgbClr val="FDF3E2"/>
+          </a:solidFill>
+          <a:ln w="9525">
+            <a:solidFill>
+              <a:srgbClr val="6B4B00"/>
+            </a:solidFill>
+            <a:prstDash val="solid"/>
+          </a:ln>
+        </p:spPr>
+      </p:sp>
+      <p:sp>
+        <p:nvSpPr>
+          <p:cNvPr id="11" name="Text 9"/>
+          <p:cNvSpPr txBox="1"/>
+          <p:nvPr/>
+        </p:nvSpPr>
+        <p:spPr>
+          <a:xfrm>
+            <a:off x="7799832" y="1984248"/>
+            <a:ext cx="3749040" cy="310896"/>
+          </a:xfrm>
+          <a:prstGeom prst="rect">
+            <a:avLst/>
+          </a:prstGeom>
+          <a:noFill/>
+          <a:ln/>
+        </p:spPr>
+        <p:txBody>
+          <a:bodyPr wrap="square" lIns="0" tIns="0" rIns="0" bIns="0" rtlCol="0" anchor="ctr"/>
+          <a:lstStyle/>
+          <a:p>
+            <a:pPr algn="ctr" indent="0" marL="0">
+              <a:buNone/>
+            </a:pPr>
+            <a:r>
+              <a:rPr lang="en-US" sz="950" b="1" dirty="0">
+                <a:solidFill>
+                  <a:srgbClr val="6B4B00"/>
+                </a:solidFill>
+                <a:latin typeface="Calibri" pitchFamily="34" charset="0"/>
+                <a:ea typeface="Calibri" pitchFamily="34" charset="-122"/>
+                <a:cs typeface="Calibri" pitchFamily="34" charset="-120"/>
+              </a:rPr>
+              <a:t>⚠ 血糖シフトの影響で参考値</a:t>
+            </a:r>
+            <a:endParaRPr lang="en-US" sz="950" dirty="0"/>
+          </a:p>
+        </p:txBody>
+      </p:sp>
+      <p:sp>
+        <p:nvSpPr>
+          <p:cNvPr id="12" name="Shape 10"/>
+          <p:cNvSpPr/>
+          <p:nvPr/>
+        </p:nvSpPr>
+        <p:spPr>
+          <a:xfrm>
+            <a:off x="548640" y="3163824"/>
+            <a:ext cx="109728" cy="109728"/>
+          </a:xfrm>
+          <a:prstGeom prst="oval">
+            <a:avLst/>
+          </a:prstGeom>
+          <a:solidFill>
+            <a:srgbClr val="1BAF7A"/>
+          </a:solidFill>
+          <a:ln/>
+        </p:spPr>
+      </p:sp>
+      <p:sp>
+        <p:nvSpPr>
+          <p:cNvPr id="13" name="Text 11"/>
+          <p:cNvSpPr txBox="1"/>
+          <p:nvPr/>
+        </p:nvSpPr>
+        <p:spPr>
+          <a:xfrm>
+            <a:off x="841248" y="3108960"/>
+            <a:ext cx="10799064" cy="457200"/>
+          </a:xfrm>
+          <a:prstGeom prst="rect">
+            <a:avLst/>
+          </a:prstGeom>
+          <a:noFill/>
+          <a:ln/>
+        </p:spPr>
+        <p:txBody>
+          <a:bodyPr wrap="square" lIns="0" tIns="0" rIns="0" bIns="0" rtlCol="0" anchor="ctr"/>
+          <a:lstStyle/>
+          <a:p>
+            <a:pPr indent="0" marL="0">
+              <a:buNone/>
+            </a:pPr>
+            <a:r>
+              <a:rPr lang="en-US" sz="1300" dirty="0">
+                <a:solidFill>
+                  <a:srgbClr val="1A1A1A"/>
+                </a:solidFill>
+                <a:latin typeface="Calibri" pitchFamily="34" charset="0"/>
+                <a:ea typeface="Calibri" pitchFamily="34" charset="-122"/>
+                <a:cs typeface="Calibri" pitchFamily="34" charset="-120"/>
+              </a:rPr>
+              <a:t>同時摂取は、練習中の燃料供給をスムージー単独と同水準（220 vs 222 mg/dL）に保ったまま、血糖の乱高下（CV・Δピーク）を明確に小さくする</a:t>
+            </a:r>
+            <a:endParaRPr lang="en-US" sz="1300" dirty="0"/>
+          </a:p>
+        </p:txBody>
+      </p:sp>
+      <p:sp>
+        <p:nvSpPr>
+          <p:cNvPr id="14" name="Shape 12"/>
+          <p:cNvSpPr/>
+          <p:nvPr/>
+        </p:nvSpPr>
+        <p:spPr>
+          <a:xfrm>
+            <a:off x="548640" y="3730752"/>
+            <a:ext cx="109728" cy="109728"/>
+          </a:xfrm>
+          <a:prstGeom prst="oval">
+            <a:avLst/>
+          </a:prstGeom>
+          <a:solidFill>
+            <a:srgbClr val="1BAF7A"/>
+          </a:solidFill>
+          <a:ln/>
+        </p:spPr>
+      </p:sp>
+      <p:sp>
+        <p:nvSpPr>
+          <p:cNvPr id="15" name="Text 13"/>
+          <p:cNvSpPr txBox="1"/>
+          <p:nvPr/>
+        </p:nvSpPr>
+        <p:spPr>
+          <a:xfrm>
+            <a:off x="841248" y="3675888"/>
+            <a:ext cx="10799064" cy="457200"/>
+          </a:xfrm>
+          <a:prstGeom prst="rect">
+            <a:avLst/>
+          </a:prstGeom>
+          <a:noFill/>
+          <a:ln/>
+        </p:spPr>
+        <p:txBody>
+          <a:bodyPr wrap="square" lIns="0" tIns="0" rIns="0" bIns="0" rtlCol="0" anchor="ctr"/>
+          <a:lstStyle/>
+          <a:p>
+            <a:pPr indent="0" marL="0">
+              <a:buNone/>
+            </a:pPr>
+            <a:r>
+              <a:rPr lang="en-US" sz="1300" dirty="0">
+                <a:solidFill>
+                  <a:srgbClr val="1A1A1A"/>
+                </a:solidFill>
+                <a:latin typeface="Calibri" pitchFamily="34" charset="0"/>
+                <a:ea typeface="Calibri" pitchFamily="34" charset="-122"/>
+                <a:cs typeface="Calibri" pitchFamily="34" charset="-120"/>
+              </a:rPr>
+              <a:t>おにぎり（ゆっくり吸収されるデンプン）が副食の急な糖吸収を緩衝し、波形がなだらかになると解釈できる</a:t>
+            </a:r>
+            <a:endParaRPr lang="en-US" sz="1300" dirty="0"/>
+          </a:p>
+        </p:txBody>
+      </p:sp>
+      <p:sp>
+        <p:nvSpPr>
+          <p:cNvPr id="16" name="Shape 14"/>
+          <p:cNvSpPr/>
+          <p:nvPr/>
+        </p:nvSpPr>
+        <p:spPr>
+          <a:xfrm>
+            <a:off x="548640" y="4297680"/>
+            <a:ext cx="109728" cy="109728"/>
+          </a:xfrm>
+          <a:prstGeom prst="oval">
+            <a:avLst/>
+          </a:prstGeom>
+          <a:solidFill>
+            <a:srgbClr val="1BAF7A"/>
+          </a:solidFill>
+          <a:ln/>
+        </p:spPr>
+      </p:sp>
+      <p:sp>
+        <p:nvSpPr>
+          <p:cNvPr id="17" name="Text 15"/>
+          <p:cNvSpPr txBox="1"/>
+          <p:nvPr/>
+        </p:nvSpPr>
+        <p:spPr>
+          <a:xfrm>
+            <a:off x="841248" y="4242816"/>
+            <a:ext cx="10799064" cy="457200"/>
+          </a:xfrm>
+          <a:prstGeom prst="rect">
+            <a:avLst/>
+          </a:prstGeom>
+          <a:noFill/>
+          <a:ln/>
+        </p:spPr>
+        <p:txBody>
+          <a:bodyPr wrap="square" lIns="0" tIns="0" rIns="0" bIns="0" rtlCol="0" anchor="ctr"/>
+          <a:lstStyle/>
+          <a:p>
+            <a:pPr indent="0" marL="0">
+              <a:buNone/>
+            </a:pPr>
+            <a:r>
+              <a:rPr lang="en-US" sz="1300" dirty="0">
+                <a:solidFill>
+                  <a:srgbClr val="1A1A1A"/>
+                </a:solidFill>
+                <a:latin typeface="Calibri" pitchFamily="34" charset="0"/>
+                <a:ea typeface="Calibri" pitchFamily="34" charset="-122"/>
+                <a:cs typeface="Calibri" pitchFamily="34" charset="-120"/>
+              </a:rPr>
+              <a:t>満腹感は上がるが、頭痛・吐き気などの消化器症状は軽微で、実害は見られない</a:t>
+            </a:r>
+            <a:endParaRPr lang="en-US" sz="1300" dirty="0"/>
+          </a:p>
+        </p:txBody>
+      </p:sp>
+      <p:sp>
+        <p:nvSpPr>
+          <p:cNvPr id="18" name="Shape 16"/>
+          <p:cNvSpPr/>
+          <p:nvPr/>
+        </p:nvSpPr>
+        <p:spPr>
+          <a:xfrm>
+            <a:off x="548640" y="4864608"/>
+            <a:ext cx="109728" cy="109728"/>
+          </a:xfrm>
+          <a:prstGeom prst="oval">
+            <a:avLst/>
+          </a:prstGeom>
+          <a:solidFill>
+            <a:srgbClr val="1BAF7A"/>
+          </a:solidFill>
+          <a:ln/>
+        </p:spPr>
+      </p:sp>
+      <p:sp>
+        <p:nvSpPr>
+          <p:cNvPr id="19" name="Text 17"/>
+          <p:cNvSpPr txBox="1"/>
+          <p:nvPr/>
+        </p:nvSpPr>
+        <p:spPr>
+          <a:xfrm>
+            <a:off x="841248" y="4809744"/>
+            <a:ext cx="10799064" cy="457200"/>
+          </a:xfrm>
+          <a:prstGeom prst="rect">
+            <a:avLst/>
+          </a:prstGeom>
+          <a:noFill/>
+          <a:ln/>
+        </p:spPr>
+        <p:txBody>
+          <a:bodyPr wrap="square" lIns="0" tIns="0" rIns="0" bIns="0" rtlCol="0" anchor="ctr"/>
+          <a:lstStyle/>
+          <a:p>
+            <a:pPr indent="0" marL="0">
+              <a:buNone/>
+            </a:pPr>
+            <a:r>
+              <a:rPr lang="en-US" sz="1300" dirty="0">
+                <a:solidFill>
+                  <a:srgbClr val="1A1A1A"/>
+                </a:solidFill>
+                <a:latin typeface="Calibri" pitchFamily="34" charset="0"/>
+                <a:ea typeface="Calibri" pitchFamily="34" charset="-122"/>
+                <a:cs typeface="Calibri" pitchFamily="34" charset="-120"/>
+              </a:rPr>
+              <a:t>夜間コンディション（起床時・睡眠）もスムージー単独よりわずかに良好な傾向</a:t>
+            </a:r>
+            <a:endParaRPr lang="en-US" sz="1300" dirty="0"/>
+          </a:p>
+        </p:txBody>
+      </p:sp>
+      <p:sp>
+        <p:nvSpPr>
+          <p:cNvPr id="20" name="Shape 18"/>
+          <p:cNvSpPr/>
+          <p:nvPr/>
+        </p:nvSpPr>
+        <p:spPr>
+          <a:xfrm>
+            <a:off x="548640" y="5623560"/>
+            <a:ext cx="11091672" cy="868680"/>
+          </a:xfrm>
+          <a:prstGeom prst="roundRect">
+            <a:avLst>
+              <a:gd name="adj" fmla="val 10526"/>
+            </a:avLst>
+          </a:prstGeom>
+          <a:solidFill>
+            <a:srgbClr val="FDF3E2"/>
+          </a:solidFill>
+          <a:ln w="12700">
+            <a:solidFill>
+              <a:srgbClr val="EDA100"/>
+            </a:solidFill>
+            <a:prstDash val="solid"/>
+          </a:ln>
+        </p:spPr>
+      </p:sp>
+      <p:sp>
+        <p:nvSpPr>
+          <p:cNvPr id="21" name="Text 19"/>
+          <p:cNvSpPr txBox="1"/>
+          <p:nvPr/>
+        </p:nvSpPr>
+        <p:spPr>
+          <a:xfrm>
+            <a:off x="777240" y="5742432"/>
+            <a:ext cx="10634472" cy="640080"/>
+          </a:xfrm>
+          <a:prstGeom prst="rect">
+            <a:avLst/>
+          </a:prstGeom>
+          <a:noFill/>
+          <a:ln/>
+        </p:spPr>
+        <p:txBody>
+          <a:bodyPr wrap="square" lIns="0" tIns="0" rIns="0" bIns="0" rtlCol="0" anchor="ctr"/>
+          <a:lstStyle/>
+          <a:p>
+            <a:pPr indent="0" marL="0">
+              <a:buNone/>
+            </a:pPr>
+            <a:r>
+              <a:rPr lang="en-US" sz="1250" b="1" dirty="0">
+                <a:solidFill>
+                  <a:srgbClr val="6B4B00"/>
+                </a:solidFill>
+                <a:latin typeface="Calibri" pitchFamily="34" charset="0"/>
+                <a:ea typeface="Calibri" pitchFamily="34" charset="-122"/>
+                <a:cs typeface="Calibri" pitchFamily="34" charset="-120"/>
+              </a:rPr>
+              <a:t>→ 「おにぎりを崩さず、副食だけをスムージー化して同時に食べる」という部分的液状化のアイデアは、血糖の観点から明確に支持される。</a:t>
+            </a:r>
+            <a:endParaRPr lang="en-US" sz="1250" dirty="0"/>
+          </a:p>
+        </p:txBody>
+      </p:sp>
+    </p:spTree>
+  </p:cSld>
+  <p:clrMapOvr>
+    <a:masterClrMapping/>
+  </p:clrMapOvr>
+</p:sld>
+</file>
+
+<file path=ppt/slides/slide7.xml><?xml version="1.0" encoding="utf-8"?>
+<p:sld xmlns:a="http://schemas.openxmlformats.org/drawingml/2006/main" xmlns:r="http://schemas.openxmlformats.org/officeDocument/2006/relationships" xmlns:p="http://schemas.openxmlformats.org/presentationml/2006/main">
+  <p:cSld name="Slide 7">
+    <p:bg>
+      <p:bgPr>
+        <a:solidFill>
+          <a:srgbClr val="FFFFFF"/>
+        </a:solidFill>
+      </p:bgPr>
+    </p:bg>
+    <p:spTree>
+      <p:nvGrpSpPr>
+        <p:cNvPr id="1" name=""/>
+        <p:cNvGrpSpPr/>
+        <p:nvPr/>
+      </p:nvGrpSpPr>
+      <p:grpSpPr>
+        <a:xfrm>
+          <a:off x="0" y="0"/>
+          <a:ext cx="0" cy="0"/>
+          <a:chOff x="0" y="0"/>
+          <a:chExt cx="0" cy="0"/>
+        </a:xfrm>
+      </p:grpSpPr>
+      <p:sp>
+        <p:nvSpPr>
+          <p:cNvPr id="2" name="Text 0"/>
+          <p:cNvSpPr txBox="1"/>
+          <p:nvPr/>
+        </p:nvSpPr>
+        <p:spPr>
+          <a:xfrm>
+            <a:off x="548640" y="384048"/>
+            <a:ext cx="11091672" cy="310896"/>
+          </a:xfrm>
+          <a:prstGeom prst="rect">
+            <a:avLst/>
+          </a:prstGeom>
+          <a:noFill/>
+          <a:ln/>
+        </p:spPr>
+        <p:txBody>
+          <a:bodyPr wrap="square" rtlCol="0" anchor="ctr"/>
+          <a:lstStyle/>
+          <a:p>
+            <a:pPr indent="0" marL="0">
+              <a:buNone/>
+            </a:pPr>
+            <a:r>
+              <a:rPr lang="en-US" sz="1250" b="1" spc="100" kern="0" dirty="0">
+                <a:solidFill>
+                  <a:srgbClr val="1C7293"/>
+                </a:solidFill>
+                <a:latin typeface="Calibri" pitchFamily="34" charset="0"/>
+                <a:ea typeface="Calibri" pitchFamily="34" charset="-122"/>
+                <a:cs typeface="Calibri" pitchFamily="34" charset="-120"/>
+              </a:rPr>
               <a:t>Q3 – RESULTS</a:t>
             </a:r>
             <a:endParaRPr lang="en-US" sz="1250" dirty="0"/>
@@ -7638,7 +8645,7 @@
       </p:sp>
       <p:graphicFrame>
         <p:nvGraphicFramePr>
-          <p:cNvPr id="7" name="Table 0"/>
+          <p:cNvPr id="8" name="Table 0"/>
           <p:cNvGraphicFramePr>
             <a:graphicFrameLocks noGrp="1"/>
           </p:cNvGraphicFramePr>
@@ -9044,9 +10051,9 @@
 </p:sld>
 </file>
 
-<file path=ppt/slides/slide7.xml><?xml version="1.0" encoding="utf-8"?>
+<file path=ppt/slides/slide8.xml><?xml version="1.0" encoding="utf-8"?>
 <p:sld xmlns:a="http://schemas.openxmlformats.org/drawingml/2006/main" xmlns:r="http://schemas.openxmlformats.org/officeDocument/2006/relationships" xmlns:p="http://schemas.openxmlformats.org/presentationml/2006/main">
-  <p:cSld name="Slide 7">
+  <p:cSld name="Slide 8">
     <p:bg>
       <p:bgPr>
         <a:solidFill>
@@ -9359,6 +10366,72 @@
         </p:nvSpPr>
         <p:spPr>
           <a:xfrm>
+            <a:off x="7708392" y="1984248"/>
+            <a:ext cx="3931920" cy="310896"/>
+          </a:xfrm>
+          <a:prstGeom prst="roundRect">
+            <a:avLst>
+              <a:gd name="adj" fmla="val 20588"/>
+            </a:avLst>
+          </a:prstGeom>
+          <a:solidFill>
+            <a:srgbClr val="FFFFFF"/>
+          </a:solidFill>
+          <a:ln w="9525">
+            <a:solidFill>
+              <a:srgbClr val="0F5C3D"/>
+            </a:solidFill>
+            <a:prstDash val="solid"/>
+          </a:ln>
+        </p:spPr>
+      </p:sp>
+      <p:sp>
+        <p:nvSpPr>
+          <p:cNvPr id="11" name="Text 9"/>
+          <p:cNvSpPr txBox="1"/>
+          <p:nvPr/>
+        </p:nvSpPr>
+        <p:spPr>
+          <a:xfrm>
+            <a:off x="7799832" y="1984248"/>
+            <a:ext cx="3749040" cy="310896"/>
+          </a:xfrm>
+          <a:prstGeom prst="rect">
+            <a:avLst/>
+          </a:prstGeom>
+          <a:noFill/>
+          <a:ln/>
+        </p:spPr>
+        <p:txBody>
+          <a:bodyPr wrap="square" lIns="0" tIns="0" rIns="0" bIns="0" rtlCol="0" anchor="ctr"/>
+          <a:lstStyle/>
+          <a:p>
+            <a:pPr algn="ctr" indent="0" marL="0">
+              <a:buNone/>
+            </a:pPr>
+            <a:r>
+              <a:rPr lang="en-US" sz="950" b="1" dirty="0">
+                <a:solidFill>
+                  <a:srgbClr val="0F5C3D"/>
+                </a:solidFill>
+                <a:latin typeface="Calibri" pitchFamily="34" charset="0"/>
+                <a:ea typeface="Calibri" pitchFamily="34" charset="-122"/>
+                <a:cs typeface="Calibri" pitchFamily="34" charset="-120"/>
+              </a:rPr>
+              <a:t>✓ シフト後で条件が揃い信頼できる</a:t>
+            </a:r>
+            <a:endParaRPr lang="en-US" sz="950" dirty="0"/>
+          </a:p>
+        </p:txBody>
+      </p:sp>
+      <p:sp>
+        <p:nvSpPr>
+          <p:cNvPr id="12" name="Shape 10"/>
+          <p:cNvSpPr/>
+          <p:nvPr/>
+        </p:nvSpPr>
+        <p:spPr>
+          <a:xfrm>
             <a:off x="548640" y="3163824"/>
             <a:ext cx="109728" cy="109728"/>
           </a:xfrm>
@@ -9373,7 +10446,7 @@
       </p:sp>
       <p:sp>
         <p:nvSpPr>
-          <p:cNvPr id="11" name="Text 9"/>
+          <p:cNvPr id="13" name="Text 11"/>
           <p:cNvSpPr txBox="1"/>
           <p:nvPr/>
         </p:nvSpPr>
@@ -9412,7 +10485,7 @@
       </p:sp>
       <p:sp>
         <p:nvSpPr>
-          <p:cNvPr id="12" name="Shape 10"/>
+          <p:cNvPr id="14" name="Shape 12"/>
           <p:cNvSpPr/>
           <p:nvPr/>
         </p:nvSpPr>
@@ -9432,7 +10505,7 @@
       </p:sp>
       <p:sp>
         <p:nvSpPr>
-          <p:cNvPr id="13" name="Text 11"/>
+          <p:cNvPr id="15" name="Text 13"/>
           <p:cNvSpPr txBox="1"/>
           <p:nvPr/>
         </p:nvSpPr>
@@ -9471,7 +10544,7 @@
       </p:sp>
       <p:sp>
         <p:nvSpPr>
-          <p:cNvPr id="14" name="Shape 12"/>
+          <p:cNvPr id="16" name="Shape 14"/>
           <p:cNvSpPr/>
           <p:nvPr/>
         </p:nvSpPr>
@@ -9491,7 +10564,7 @@
       </p:sp>
       <p:sp>
         <p:nvSpPr>
-          <p:cNvPr id="15" name="Text 13"/>
+          <p:cNvPr id="17" name="Text 15"/>
           <p:cNvSpPr txBox="1"/>
           <p:nvPr/>
         </p:nvSpPr>
@@ -9530,7 +10603,7 @@
       </p:sp>
       <p:sp>
         <p:nvSpPr>
-          <p:cNvPr id="16" name="Shape 14"/>
+          <p:cNvPr id="18" name="Shape 16"/>
           <p:cNvSpPr/>
           <p:nvPr/>
         </p:nvSpPr>
@@ -9550,7 +10623,7 @@
       </p:sp>
       <p:sp>
         <p:nvSpPr>
-          <p:cNvPr id="17" name="Text 15"/>
+          <p:cNvPr id="19" name="Text 17"/>
           <p:cNvSpPr txBox="1"/>
           <p:nvPr/>
         </p:nvSpPr>
@@ -9589,7 +10662,7 @@
       </p:sp>
       <p:sp>
         <p:nvSpPr>
-          <p:cNvPr id="18" name="Shape 16"/>
+          <p:cNvPr id="20" name="Shape 18"/>
           <p:cNvSpPr/>
           <p:nvPr/>
         </p:nvSpPr>
@@ -9609,7 +10682,7 @@
       </p:sp>
       <p:sp>
         <p:nvSpPr>
-          <p:cNvPr id="19" name="Text 17"/>
+          <p:cNvPr id="21" name="Text 19"/>
           <p:cNvSpPr txBox="1"/>
           <p:nvPr/>
         </p:nvSpPr>
@@ -9648,7 +10721,7 @@
       </p:sp>
       <p:sp>
         <p:nvSpPr>
-          <p:cNvPr id="20" name="Shape 18"/>
+          <p:cNvPr id="22" name="Shape 20"/>
           <p:cNvSpPr/>
           <p:nvPr/>
         </p:nvSpPr>
@@ -9675,7 +10748,7 @@
       </p:sp>
       <p:sp>
         <p:nvSpPr>
-          <p:cNvPr id="21" name="Text 19"/>
+          <p:cNvPr id="23" name="Text 21"/>
           <p:cNvSpPr txBox="1"/>
           <p:nvPr/>
         </p:nvSpPr>
@@ -9720,9 +10793,9 @@
 </p:sld>
 </file>
 
-<file path=ppt/slides/slide8.xml><?xml version="1.0" encoding="utf-8"?>
+<file path=ppt/slides/slide9.xml><?xml version="1.0" encoding="utf-8"?>
 <p:sld xmlns:a="http://schemas.openxmlformats.org/drawingml/2006/main" xmlns:r="http://schemas.openxmlformats.org/officeDocument/2006/relationships" xmlns:p="http://schemas.openxmlformats.org/presentationml/2006/main">
-  <p:cSld name="Slide 8">
+  <p:cSld name="Slide 9">
     <p:bg>
       <p:bgPr>
         <a:solidFill>
@@ -9936,7 +11009,7 @@
                 <a:ea typeface="Cambria" pitchFamily="34" charset="-122"/>
                 <a:cs typeface="Cambria" pitchFamily="34" charset="-120"/>
               </a:rPr>
-              <a:t>スムージー</a:t>
+              <a:t>スムージー ⚠参考値</a:t>
             </a:r>
             <a:endParaRPr lang="en-US" sz="1900" dirty="0"/>
           </a:p>
@@ -9975,7 +11048,7 @@
                 <a:ea typeface="Calibri" pitchFamily="34" charset="-122"/>
                 <a:cs typeface="Calibri" pitchFamily="34" charset="-120"/>
               </a:rPr>
-              <a:t>練習中の燃料供給が多く、不調もない</a:t>
+              <a:t>血糖シフトの影響あり。練習中の燃料供給は多い</a:t>
             </a:r>
             <a:endParaRPr lang="en-US" sz="1050" dirty="0"/>
           </a:p>
@@ -10095,7 +11168,7 @@
                 <a:ea typeface="Cambria" pitchFamily="34" charset="-122"/>
                 <a:cs typeface="Cambria" pitchFamily="34" charset="-120"/>
               </a:rPr>
-              <a:t>おにぎりと8:00に同時摂取</a:t>
+              <a:t>おにぎりと8:00に同時摂取 ⚠参考値</a:t>
             </a:r>
             <a:endParaRPr lang="en-US" sz="1900" dirty="0"/>
           </a:p>
@@ -10134,7 +11207,7 @@
                 <a:ea typeface="Calibri" pitchFamily="34" charset="-122"/>
                 <a:cs typeface="Calibri" pitchFamily="34" charset="-120"/>
               </a:rPr>
-              <a:t>血糖の乱高下を抑えつつ燃料は確保</a:t>
+              <a:t>血糖シフトの影響あり。乱高下を抑え燃料は確保</a:t>
             </a:r>
             <a:endParaRPr lang="en-US" sz="1050" dirty="0"/>
           </a:p>
@@ -10254,7 +11327,7 @@
                 <a:ea typeface="Cambria" pitchFamily="34" charset="-122"/>
                 <a:cs typeface="Cambria" pitchFamily="34" charset="-120"/>
               </a:rPr>
-              <a:t>有望だが要検証</a:t>
+              <a:t>有望だが要検証 ✓信頼できる</a:t>
             </a:r>
             <a:endParaRPr lang="en-US" sz="1900" dirty="0"/>
           </a:p>
@@ -10293,7 +11366,7 @@
                 <a:ea typeface="Calibri" pitchFamily="34" charset="-122"/>
                 <a:cs typeface="Calibri" pitchFamily="34" charset="-120"/>
               </a:rPr>
-              <a:t>血糖面は良いが持久力の体感と矛盾</a:t>
+              <a:t>シフト後で条件が揃う。体感との矛盾のみ要検証</a:t>
             </a:r>
             <a:endParaRPr lang="en-US" sz="1050" dirty="0"/>
           </a:p>
